--- a/orientation_startsemester/Introduction to Artificial Intelligence_distributed.pptx
+++ b/orientation_startsemester/Introduction to Artificial Intelligence_distributed.pptx
@@ -5,7 +5,7 @@
     <p:sldMasterId id="2147483673" r:id="rId1"/>
   </p:sldMasterIdLst>
   <p:notesMasterIdLst>
-    <p:notesMasterId r:id="rId13"/>
+    <p:notesMasterId r:id="rId14"/>
   </p:notesMasterIdLst>
   <p:sldIdLst>
     <p:sldId id="256" r:id="rId2"/>
@@ -18,7 +18,8 @@
     <p:sldId id="824" r:id="rId9"/>
     <p:sldId id="825" r:id="rId10"/>
     <p:sldId id="798" r:id="rId11"/>
-    <p:sldId id="818" r:id="rId12"/>
+    <p:sldId id="272" r:id="rId12"/>
+    <p:sldId id="818" r:id="rId13"/>
   </p:sldIdLst>
   <p:sldSz cx="12192000" cy="6858000"/>
   <p:notesSz cx="6858000" cy="9144000"/>
@@ -163,7 +164,7 @@
 </file>
 
 <file path=ppt/diagrams/colors1.xml><?xml version="1.0" encoding="utf-8"?>
-<dgm:colorsDef xmlns:dgm="http://schemas.openxmlformats.org/drawingml/2006/diagram" xmlns:a="http://schemas.openxmlformats.org/drawingml/2006/main" uniqueId="urn:microsoft.com/office/officeart/2005/8/colors/colorful2">
+<dgm:colorsDef xmlns:dgm="http://schemas.openxmlformats.org/drawingml/2006/diagram" xmlns:a="http://schemas.openxmlformats.org/drawingml/2006/main" uniqueId="urn:microsoft.com/office/officeart/2005/8/colors/colorful2#1">
   <dgm:title val=""/>
   <dgm:desc val=""/>
   <dgm:catLst>
@@ -1866,7 +1867,789 @@
 </file>
 
 <file path=ppt/diagrams/colors3.xml><?xml version="1.0" encoding="utf-8"?>
-<dgm:colorsDef xmlns:dgm="http://schemas.openxmlformats.org/drawingml/2006/diagram" xmlns:a="http://schemas.openxmlformats.org/drawingml/2006/main" uniqueId="urn:microsoft.com/office/officeart/2005/8/colors/accent2_1">
+<dgm:colorsDef xmlns:dgm="http://schemas.openxmlformats.org/drawingml/2006/diagram" xmlns:a="http://schemas.openxmlformats.org/drawingml/2006/main" uniqueId="urn:microsoft.com/office/officeart/2005/8/colors/colorful5#2">
+  <dgm:title val=""/>
+  <dgm:desc val=""/>
+  <dgm:catLst>
+    <dgm:cat type="colorful" pri="10500"/>
+  </dgm:catLst>
+  <dgm:styleLbl name="node0">
+    <dgm:fillClrLst meth="repeat">
+      <a:schemeClr val="accent4"/>
+    </dgm:fillClrLst>
+    <dgm:linClrLst meth="repeat">
+      <a:schemeClr val="lt1"/>
+    </dgm:linClrLst>
+    <dgm:effectClrLst/>
+    <dgm:txLinClrLst/>
+    <dgm:txFillClrLst/>
+    <dgm:txEffectClrLst/>
+  </dgm:styleLbl>
+  <dgm:styleLbl name="node1">
+    <dgm:fillClrLst>
+      <a:schemeClr val="accent5"/>
+      <a:schemeClr val="accent6"/>
+    </dgm:fillClrLst>
+    <dgm:linClrLst meth="repeat">
+      <a:schemeClr val="lt1"/>
+    </dgm:linClrLst>
+    <dgm:effectClrLst/>
+    <dgm:txLinClrLst/>
+    <dgm:txFillClrLst/>
+    <dgm:txEffectClrLst/>
+  </dgm:styleLbl>
+  <dgm:styleLbl name="alignNode1">
+    <dgm:fillClrLst>
+      <a:schemeClr val="accent5"/>
+      <a:schemeClr val="accent6"/>
+    </dgm:fillClrLst>
+    <dgm:linClrLst>
+      <a:schemeClr val="accent5"/>
+      <a:schemeClr val="accent6"/>
+    </dgm:linClrLst>
+    <dgm:effectClrLst/>
+    <dgm:txLinClrLst/>
+    <dgm:txFillClrLst/>
+    <dgm:txEffectClrLst/>
+  </dgm:styleLbl>
+  <dgm:styleLbl name="lnNode1">
+    <dgm:fillClrLst>
+      <a:schemeClr val="accent5"/>
+      <a:schemeClr val="accent6"/>
+    </dgm:fillClrLst>
+    <dgm:linClrLst meth="repeat">
+      <a:schemeClr val="lt1"/>
+    </dgm:linClrLst>
+    <dgm:effectClrLst/>
+    <dgm:txLinClrLst/>
+    <dgm:txFillClrLst/>
+    <dgm:txEffectClrLst/>
+  </dgm:styleLbl>
+  <dgm:styleLbl name="vennNode1">
+    <dgm:fillClrLst>
+      <a:schemeClr val="accent5">
+        <a:alpha val="50000"/>
+      </a:schemeClr>
+      <a:schemeClr val="accent6">
+        <a:alpha val="50000"/>
+      </a:schemeClr>
+    </dgm:fillClrLst>
+    <dgm:linClrLst meth="repeat">
+      <a:schemeClr val="lt1"/>
+    </dgm:linClrLst>
+    <dgm:effectClrLst/>
+    <dgm:txLinClrLst/>
+    <dgm:txFillClrLst/>
+    <dgm:txEffectClrLst/>
+  </dgm:styleLbl>
+  <dgm:styleLbl name="node2">
+    <dgm:fillClrLst>
+      <a:schemeClr val="accent6"/>
+    </dgm:fillClrLst>
+    <dgm:linClrLst meth="repeat">
+      <a:schemeClr val="lt1"/>
+    </dgm:linClrLst>
+    <dgm:effectClrLst/>
+    <dgm:txLinClrLst/>
+    <dgm:txFillClrLst/>
+    <dgm:txEffectClrLst/>
+  </dgm:styleLbl>
+  <dgm:styleLbl name="node3">
+    <dgm:fillClrLst>
+      <a:schemeClr val="accent1"/>
+    </dgm:fillClrLst>
+    <dgm:linClrLst meth="repeat">
+      <a:schemeClr val="lt1"/>
+    </dgm:linClrLst>
+    <dgm:effectClrLst/>
+    <dgm:txLinClrLst/>
+    <dgm:txFillClrLst/>
+    <dgm:txEffectClrLst/>
+  </dgm:styleLbl>
+  <dgm:styleLbl name="node4">
+    <dgm:fillClrLst>
+      <a:schemeClr val="accent2"/>
+    </dgm:fillClrLst>
+    <dgm:linClrLst meth="repeat">
+      <a:schemeClr val="lt1"/>
+    </dgm:linClrLst>
+    <dgm:effectClrLst/>
+    <dgm:txLinClrLst/>
+    <dgm:txFillClrLst/>
+    <dgm:txEffectClrLst/>
+  </dgm:styleLbl>
+  <dgm:styleLbl name="fgImgPlace1">
+    <dgm:fillClrLst>
+      <a:schemeClr val="accent5">
+        <a:tint val="50000"/>
+      </a:schemeClr>
+      <a:schemeClr val="accent6">
+        <a:tint val="50000"/>
+      </a:schemeClr>
+    </dgm:fillClrLst>
+    <dgm:linClrLst meth="repeat">
+      <a:schemeClr val="lt1"/>
+    </dgm:linClrLst>
+    <dgm:effectClrLst/>
+    <dgm:txLinClrLst/>
+    <dgm:txFillClrLst meth="repeat">
+      <a:schemeClr val="lt1"/>
+    </dgm:txFillClrLst>
+    <dgm:txEffectClrLst/>
+  </dgm:styleLbl>
+  <dgm:styleLbl name="alignImgPlace1">
+    <dgm:fillClrLst>
+      <a:schemeClr val="accent5">
+        <a:tint val="50000"/>
+      </a:schemeClr>
+      <a:schemeClr val="accent6">
+        <a:tint val="20000"/>
+      </a:schemeClr>
+    </dgm:fillClrLst>
+    <dgm:linClrLst meth="repeat">
+      <a:schemeClr val="lt1"/>
+    </dgm:linClrLst>
+    <dgm:effectClrLst/>
+    <dgm:txLinClrLst/>
+    <dgm:txFillClrLst meth="repeat">
+      <a:schemeClr val="lt1"/>
+    </dgm:txFillClrLst>
+    <dgm:txEffectClrLst/>
+  </dgm:styleLbl>
+  <dgm:styleLbl name="bgImgPlace1">
+    <dgm:fillClrLst>
+      <a:schemeClr val="accent5">
+        <a:tint val="50000"/>
+      </a:schemeClr>
+      <a:schemeClr val="accent6">
+        <a:tint val="20000"/>
+      </a:schemeClr>
+    </dgm:fillClrLst>
+    <dgm:linClrLst meth="repeat">
+      <a:schemeClr val="lt1"/>
+    </dgm:linClrLst>
+    <dgm:effectClrLst/>
+    <dgm:txLinClrLst/>
+    <dgm:txFillClrLst meth="repeat">
+      <a:schemeClr val="lt1"/>
+    </dgm:txFillClrLst>
+    <dgm:txEffectClrLst/>
+  </dgm:styleLbl>
+  <dgm:styleLbl name="sibTrans2D1">
+    <dgm:fillClrLst>
+      <a:schemeClr val="accent5"/>
+      <a:schemeClr val="accent6"/>
+    </dgm:fillClrLst>
+    <dgm:linClrLst meth="repeat">
+      <a:schemeClr val="lt1"/>
+    </dgm:linClrLst>
+    <dgm:effectClrLst/>
+    <dgm:txLinClrLst/>
+    <dgm:txFillClrLst/>
+    <dgm:txEffectClrLst/>
+  </dgm:styleLbl>
+  <dgm:styleLbl name="fgSibTrans2D1">
+    <dgm:fillClrLst>
+      <a:schemeClr val="accent5"/>
+      <a:schemeClr val="accent6"/>
+    </dgm:fillClrLst>
+    <dgm:linClrLst meth="repeat">
+      <a:schemeClr val="lt1"/>
+    </dgm:linClrLst>
+    <dgm:effectClrLst/>
+    <dgm:txLinClrLst/>
+    <dgm:txFillClrLst meth="repeat">
+      <a:schemeClr val="lt1"/>
+    </dgm:txFillClrLst>
+    <dgm:txEffectClrLst/>
+  </dgm:styleLbl>
+  <dgm:styleLbl name="bgSibTrans2D1">
+    <dgm:fillClrLst>
+      <a:schemeClr val="accent5"/>
+      <a:schemeClr val="accent6"/>
+    </dgm:fillClrLst>
+    <dgm:linClrLst meth="repeat">
+      <a:schemeClr val="lt1"/>
+    </dgm:linClrLst>
+    <dgm:effectClrLst/>
+    <dgm:txLinClrLst/>
+    <dgm:txFillClrLst meth="repeat">
+      <a:schemeClr val="lt1"/>
+    </dgm:txFillClrLst>
+    <dgm:txEffectClrLst/>
+  </dgm:styleLbl>
+  <dgm:styleLbl name="sibTrans1D1">
+    <dgm:fillClrLst/>
+    <dgm:linClrLst>
+      <a:schemeClr val="accent5"/>
+      <a:schemeClr val="accent6"/>
+    </dgm:linClrLst>
+    <dgm:effectClrLst/>
+    <dgm:txLinClrLst/>
+    <dgm:txFillClrLst meth="repeat">
+      <a:schemeClr val="tx1"/>
+    </dgm:txFillClrLst>
+    <dgm:txEffectClrLst/>
+  </dgm:styleLbl>
+  <dgm:styleLbl name="callout">
+    <dgm:fillClrLst meth="repeat">
+      <a:schemeClr val="accent5"/>
+    </dgm:fillClrLst>
+    <dgm:linClrLst meth="repeat">
+      <a:schemeClr val="accent5">
+        <a:tint val="50000"/>
+      </a:schemeClr>
+    </dgm:linClrLst>
+    <dgm:effectClrLst/>
+    <dgm:txLinClrLst/>
+    <dgm:txFillClrLst meth="repeat">
+      <a:schemeClr val="tx1"/>
+    </dgm:txFillClrLst>
+    <dgm:txEffectClrLst/>
+  </dgm:styleLbl>
+  <dgm:styleLbl name="asst0">
+    <dgm:fillClrLst meth="repeat">
+      <a:schemeClr val="accent5"/>
+    </dgm:fillClrLst>
+    <dgm:linClrLst meth="repeat">
+      <a:schemeClr val="lt1">
+        <a:shade val="80000"/>
+      </a:schemeClr>
+    </dgm:linClrLst>
+    <dgm:effectClrLst/>
+    <dgm:txLinClrLst/>
+    <dgm:txFillClrLst/>
+    <dgm:txEffectClrLst/>
+  </dgm:styleLbl>
+  <dgm:styleLbl name="asst1">
+    <dgm:fillClrLst meth="repeat">
+      <a:schemeClr val="accent6"/>
+    </dgm:fillClrLst>
+    <dgm:linClrLst meth="repeat">
+      <a:schemeClr val="lt1">
+        <a:shade val="80000"/>
+      </a:schemeClr>
+    </dgm:linClrLst>
+    <dgm:effectClrLst/>
+    <dgm:txLinClrLst/>
+    <dgm:txFillClrLst/>
+    <dgm:txEffectClrLst/>
+  </dgm:styleLbl>
+  <dgm:styleLbl name="asst2">
+    <dgm:fillClrLst>
+      <a:schemeClr val="accent1"/>
+    </dgm:fillClrLst>
+    <dgm:linClrLst meth="repeat">
+      <a:schemeClr val="lt1"/>
+    </dgm:linClrLst>
+    <dgm:effectClrLst/>
+    <dgm:txLinClrLst/>
+    <dgm:txFillClrLst/>
+    <dgm:txEffectClrLst/>
+  </dgm:styleLbl>
+  <dgm:styleLbl name="asst3">
+    <dgm:fillClrLst>
+      <a:schemeClr val="accent2"/>
+    </dgm:fillClrLst>
+    <dgm:linClrLst meth="repeat">
+      <a:schemeClr val="lt1"/>
+    </dgm:linClrLst>
+    <dgm:effectClrLst/>
+    <dgm:txLinClrLst/>
+    <dgm:txFillClrLst/>
+    <dgm:txEffectClrLst/>
+  </dgm:styleLbl>
+  <dgm:styleLbl name="asst4">
+    <dgm:fillClrLst>
+      <a:schemeClr val="accent3"/>
+    </dgm:fillClrLst>
+    <dgm:linClrLst meth="repeat">
+      <a:schemeClr val="lt1"/>
+    </dgm:linClrLst>
+    <dgm:effectClrLst/>
+    <dgm:txLinClrLst/>
+    <dgm:txFillClrLst/>
+    <dgm:txEffectClrLst/>
+  </dgm:styleLbl>
+  <dgm:styleLbl name="parChTrans2D1">
+    <dgm:fillClrLst meth="repeat">
+      <a:schemeClr val="accent5"/>
+    </dgm:fillClrLst>
+    <dgm:linClrLst meth="repeat">
+      <a:schemeClr val="lt1"/>
+    </dgm:linClrLst>
+    <dgm:effectClrLst/>
+    <dgm:txLinClrLst/>
+    <dgm:txFillClrLst meth="repeat">
+      <a:schemeClr val="lt1"/>
+    </dgm:txFillClrLst>
+    <dgm:txEffectClrLst/>
+  </dgm:styleLbl>
+  <dgm:styleLbl name="parChTrans2D2">
+    <dgm:fillClrLst meth="repeat">
+      <a:schemeClr val="accent6"/>
+    </dgm:fillClrLst>
+    <dgm:linClrLst meth="repeat">
+      <a:schemeClr val="lt1"/>
+    </dgm:linClrLst>
+    <dgm:effectClrLst/>
+    <dgm:txLinClrLst/>
+    <dgm:txFillClrLst/>
+    <dgm:txEffectClrLst/>
+  </dgm:styleLbl>
+  <dgm:styleLbl name="parChTrans2D3">
+    <dgm:fillClrLst meth="repeat">
+      <a:schemeClr val="accent6"/>
+    </dgm:fillClrLst>
+    <dgm:linClrLst meth="repeat">
+      <a:schemeClr val="lt1"/>
+    </dgm:linClrLst>
+    <dgm:effectClrLst/>
+    <dgm:txLinClrLst/>
+    <dgm:txFillClrLst/>
+    <dgm:txEffectClrLst/>
+  </dgm:styleLbl>
+  <dgm:styleLbl name="parChTrans2D4">
+    <dgm:fillClrLst meth="repeat">
+      <a:schemeClr val="accent1"/>
+    </dgm:fillClrLst>
+    <dgm:linClrLst meth="repeat">
+      <a:schemeClr val="lt1"/>
+    </dgm:linClrLst>
+    <dgm:effectClrLst/>
+    <dgm:txLinClrLst/>
+    <dgm:txFillClrLst meth="repeat">
+      <a:schemeClr val="lt1"/>
+    </dgm:txFillClrLst>
+    <dgm:txEffectClrLst/>
+  </dgm:styleLbl>
+  <dgm:styleLbl name="parChTrans1D1">
+    <dgm:fillClrLst meth="repeat">
+      <a:schemeClr val="accent5"/>
+    </dgm:fillClrLst>
+    <dgm:linClrLst meth="repeat">
+      <a:schemeClr val="accent5"/>
+    </dgm:linClrLst>
+    <dgm:effectClrLst/>
+    <dgm:txLinClrLst/>
+    <dgm:txFillClrLst meth="repeat">
+      <a:schemeClr val="tx1"/>
+    </dgm:txFillClrLst>
+    <dgm:txEffectClrLst/>
+  </dgm:styleLbl>
+  <dgm:styleLbl name="parChTrans1D2">
+    <dgm:fillClrLst meth="repeat">
+      <a:schemeClr val="accent6">
+        <a:tint val="90000"/>
+      </a:schemeClr>
+    </dgm:fillClrLst>
+    <dgm:linClrLst meth="repeat">
+      <a:schemeClr val="accent6"/>
+    </dgm:linClrLst>
+    <dgm:effectClrLst/>
+    <dgm:txLinClrLst/>
+    <dgm:txFillClrLst meth="repeat">
+      <a:schemeClr val="tx1"/>
+    </dgm:txFillClrLst>
+    <dgm:txEffectClrLst/>
+  </dgm:styleLbl>
+  <dgm:styleLbl name="parChTrans1D3">
+    <dgm:fillClrLst meth="repeat">
+      <a:schemeClr val="accent6">
+        <a:tint val="70000"/>
+      </a:schemeClr>
+    </dgm:fillClrLst>
+    <dgm:linClrLst meth="repeat">
+      <a:schemeClr val="accent1"/>
+    </dgm:linClrLst>
+    <dgm:effectClrLst/>
+    <dgm:txLinClrLst/>
+    <dgm:txFillClrLst meth="repeat">
+      <a:schemeClr val="tx1"/>
+    </dgm:txFillClrLst>
+    <dgm:txEffectClrLst/>
+  </dgm:styleLbl>
+  <dgm:styleLbl name="parChTrans1D4">
+    <dgm:fillClrLst meth="repeat">
+      <a:schemeClr val="accent6">
+        <a:tint val="50000"/>
+      </a:schemeClr>
+    </dgm:fillClrLst>
+    <dgm:linClrLst meth="repeat">
+      <a:schemeClr val="accent2"/>
+    </dgm:linClrLst>
+    <dgm:effectClrLst/>
+    <dgm:txLinClrLst/>
+    <dgm:txFillClrLst meth="repeat">
+      <a:schemeClr val="tx1"/>
+    </dgm:txFillClrLst>
+    <dgm:txEffectClrLst/>
+  </dgm:styleLbl>
+  <dgm:styleLbl name="fgAcc1">
+    <dgm:fillClrLst meth="repeat">
+      <a:schemeClr val="lt1">
+        <a:alpha val="90000"/>
+      </a:schemeClr>
+    </dgm:fillClrLst>
+    <dgm:linClrLst>
+      <a:schemeClr val="accent5"/>
+      <a:schemeClr val="accent6"/>
+    </dgm:linClrLst>
+    <dgm:effectClrLst/>
+    <dgm:txLinClrLst/>
+    <dgm:txFillClrLst meth="repeat">
+      <a:schemeClr val="dk1"/>
+    </dgm:txFillClrLst>
+    <dgm:txEffectClrLst/>
+  </dgm:styleLbl>
+  <dgm:styleLbl name="conFgAcc1">
+    <dgm:fillClrLst meth="repeat">
+      <a:schemeClr val="lt1">
+        <a:alpha val="90000"/>
+      </a:schemeClr>
+    </dgm:fillClrLst>
+    <dgm:linClrLst>
+      <a:schemeClr val="accent5"/>
+      <a:schemeClr val="accent6"/>
+    </dgm:linClrLst>
+    <dgm:effectClrLst/>
+    <dgm:txLinClrLst/>
+    <dgm:txFillClrLst meth="repeat">
+      <a:schemeClr val="dk1"/>
+    </dgm:txFillClrLst>
+    <dgm:txEffectClrLst/>
+  </dgm:styleLbl>
+  <dgm:styleLbl name="alignAcc1">
+    <dgm:fillClrLst meth="repeat">
+      <a:schemeClr val="lt1">
+        <a:alpha val="90000"/>
+      </a:schemeClr>
+    </dgm:fillClrLst>
+    <dgm:linClrLst>
+      <a:schemeClr val="accent5"/>
+      <a:schemeClr val="accent6"/>
+    </dgm:linClrLst>
+    <dgm:effectClrLst/>
+    <dgm:txLinClrLst/>
+    <dgm:txFillClrLst meth="repeat">
+      <a:schemeClr val="dk1"/>
+    </dgm:txFillClrLst>
+    <dgm:txEffectClrLst/>
+  </dgm:styleLbl>
+  <dgm:styleLbl name="trAlignAcc1">
+    <dgm:fillClrLst meth="repeat">
+      <a:schemeClr val="lt1">
+        <a:alpha val="40000"/>
+      </a:schemeClr>
+    </dgm:fillClrLst>
+    <dgm:linClrLst meth="repeat">
+      <a:schemeClr val="accent5"/>
+    </dgm:linClrLst>
+    <dgm:effectClrLst/>
+    <dgm:txLinClrLst/>
+    <dgm:txFillClrLst meth="repeat">
+      <a:schemeClr val="dk1"/>
+    </dgm:txFillClrLst>
+    <dgm:txEffectClrLst/>
+  </dgm:styleLbl>
+  <dgm:styleLbl name="bgAcc1">
+    <dgm:fillClrLst meth="repeat">
+      <a:schemeClr val="lt1">
+        <a:alpha val="90000"/>
+      </a:schemeClr>
+    </dgm:fillClrLst>
+    <dgm:linClrLst>
+      <a:schemeClr val="accent5"/>
+      <a:schemeClr val="accent6"/>
+    </dgm:linClrLst>
+    <dgm:effectClrLst/>
+    <dgm:txLinClrLst/>
+    <dgm:txFillClrLst meth="repeat">
+      <a:schemeClr val="dk1"/>
+    </dgm:txFillClrLst>
+    <dgm:txEffectClrLst/>
+  </dgm:styleLbl>
+  <dgm:styleLbl name="solidFgAcc1">
+    <dgm:fillClrLst meth="repeat">
+      <a:schemeClr val="lt1"/>
+    </dgm:fillClrLst>
+    <dgm:linClrLst>
+      <a:schemeClr val="accent5"/>
+      <a:schemeClr val="accent6"/>
+    </dgm:linClrLst>
+    <dgm:effectClrLst/>
+    <dgm:txLinClrLst/>
+    <dgm:txFillClrLst meth="repeat">
+      <a:schemeClr val="dk1"/>
+    </dgm:txFillClrLst>
+    <dgm:txEffectClrLst/>
+  </dgm:styleLbl>
+  <dgm:styleLbl name="solidAlignAcc1">
+    <dgm:fillClrLst meth="repeat">
+      <a:schemeClr val="lt1"/>
+    </dgm:fillClrLst>
+    <dgm:linClrLst>
+      <a:schemeClr val="accent5"/>
+      <a:schemeClr val="accent6"/>
+    </dgm:linClrLst>
+    <dgm:effectClrLst/>
+    <dgm:txLinClrLst/>
+    <dgm:txFillClrLst meth="repeat">
+      <a:schemeClr val="dk1"/>
+    </dgm:txFillClrLst>
+    <dgm:txEffectClrLst/>
+  </dgm:styleLbl>
+  <dgm:styleLbl name="solidBgAcc1">
+    <dgm:fillClrLst meth="repeat">
+      <a:schemeClr val="lt1"/>
+    </dgm:fillClrLst>
+    <dgm:linClrLst>
+      <a:schemeClr val="accent5"/>
+      <a:schemeClr val="accent6"/>
+    </dgm:linClrLst>
+    <dgm:effectClrLst/>
+    <dgm:txLinClrLst/>
+    <dgm:txFillClrLst meth="repeat">
+      <a:schemeClr val="dk1"/>
+    </dgm:txFillClrLst>
+    <dgm:txEffectClrLst/>
+  </dgm:styleLbl>
+  <dgm:styleLbl name="fgAccFollowNode1">
+    <dgm:fillClrLst>
+      <a:schemeClr val="accent5">
+        <a:tint val="40000"/>
+        <a:alpha val="90000"/>
+      </a:schemeClr>
+      <a:schemeClr val="accent6">
+        <a:tint val="40000"/>
+        <a:alpha val="90000"/>
+      </a:schemeClr>
+    </dgm:fillClrLst>
+    <dgm:linClrLst>
+      <a:schemeClr val="accent5">
+        <a:tint val="40000"/>
+        <a:alpha val="90000"/>
+      </a:schemeClr>
+      <a:schemeClr val="accent5">
+        <a:tint val="40000"/>
+        <a:alpha val="90000"/>
+      </a:schemeClr>
+    </dgm:linClrLst>
+    <dgm:effectClrLst/>
+    <dgm:txLinClrLst/>
+    <dgm:txFillClrLst meth="repeat">
+      <a:schemeClr val="dk1"/>
+    </dgm:txFillClrLst>
+    <dgm:txEffectClrLst/>
+  </dgm:styleLbl>
+  <dgm:styleLbl name="alignAccFollowNode1">
+    <dgm:fillClrLst>
+      <a:schemeClr val="accent5">
+        <a:tint val="40000"/>
+        <a:alpha val="90000"/>
+      </a:schemeClr>
+      <a:schemeClr val="accent6">
+        <a:tint val="40000"/>
+        <a:alpha val="90000"/>
+      </a:schemeClr>
+    </dgm:fillClrLst>
+    <dgm:linClrLst>
+      <a:schemeClr val="accent5">
+        <a:tint val="40000"/>
+        <a:alpha val="90000"/>
+      </a:schemeClr>
+      <a:schemeClr val="accent6">
+        <a:tint val="40000"/>
+        <a:alpha val="90000"/>
+      </a:schemeClr>
+    </dgm:linClrLst>
+    <dgm:effectClrLst/>
+    <dgm:txLinClrLst/>
+    <dgm:txFillClrLst meth="repeat">
+      <a:schemeClr val="dk1"/>
+    </dgm:txFillClrLst>
+    <dgm:txEffectClrLst/>
+  </dgm:styleLbl>
+  <dgm:styleLbl name="bgAccFollowNode1">
+    <dgm:fillClrLst>
+      <a:schemeClr val="accent5">
+        <a:tint val="40000"/>
+        <a:alpha val="90000"/>
+      </a:schemeClr>
+      <a:schemeClr val="accent6">
+        <a:tint val="40000"/>
+        <a:alpha val="90000"/>
+      </a:schemeClr>
+    </dgm:fillClrLst>
+    <dgm:linClrLst>
+      <a:schemeClr val="accent5">
+        <a:tint val="40000"/>
+        <a:alpha val="90000"/>
+      </a:schemeClr>
+      <a:schemeClr val="accent6">
+        <a:tint val="40000"/>
+        <a:alpha val="90000"/>
+      </a:schemeClr>
+    </dgm:linClrLst>
+    <dgm:effectClrLst/>
+    <dgm:txLinClrLst/>
+    <dgm:txFillClrLst meth="repeat">
+      <a:schemeClr val="dk1"/>
+    </dgm:txFillClrLst>
+    <dgm:txEffectClrLst/>
+  </dgm:styleLbl>
+  <dgm:styleLbl name="fgAcc0">
+    <dgm:fillClrLst meth="repeat">
+      <a:schemeClr val="lt1">
+        <a:alpha val="90000"/>
+      </a:schemeClr>
+    </dgm:fillClrLst>
+    <dgm:linClrLst>
+      <a:schemeClr val="accent4"/>
+    </dgm:linClrLst>
+    <dgm:effectClrLst/>
+    <dgm:txLinClrLst/>
+    <dgm:txFillClrLst meth="repeat">
+      <a:schemeClr val="dk1"/>
+    </dgm:txFillClrLst>
+    <dgm:txEffectClrLst/>
+  </dgm:styleLbl>
+  <dgm:styleLbl name="fgAcc2">
+    <dgm:fillClrLst meth="repeat">
+      <a:schemeClr val="lt1">
+        <a:alpha val="90000"/>
+      </a:schemeClr>
+    </dgm:fillClrLst>
+    <dgm:linClrLst>
+      <a:schemeClr val="accent6"/>
+    </dgm:linClrLst>
+    <dgm:effectClrLst/>
+    <dgm:txLinClrLst/>
+    <dgm:txFillClrLst meth="repeat">
+      <a:schemeClr val="dk1"/>
+    </dgm:txFillClrLst>
+    <dgm:txEffectClrLst/>
+  </dgm:styleLbl>
+  <dgm:styleLbl name="fgAcc3">
+    <dgm:fillClrLst meth="repeat">
+      <a:schemeClr val="lt1">
+        <a:alpha val="90000"/>
+      </a:schemeClr>
+    </dgm:fillClrLst>
+    <dgm:linClrLst>
+      <a:schemeClr val="accent1"/>
+    </dgm:linClrLst>
+    <dgm:effectClrLst/>
+    <dgm:txLinClrLst/>
+    <dgm:txFillClrLst meth="repeat">
+      <a:schemeClr val="dk1"/>
+    </dgm:txFillClrLst>
+    <dgm:txEffectClrLst/>
+  </dgm:styleLbl>
+  <dgm:styleLbl name="fgAcc4">
+    <dgm:fillClrLst meth="repeat">
+      <a:schemeClr val="lt1">
+        <a:alpha val="90000"/>
+      </a:schemeClr>
+    </dgm:fillClrLst>
+    <dgm:linClrLst>
+      <a:schemeClr val="accent2"/>
+    </dgm:linClrLst>
+    <dgm:effectClrLst/>
+    <dgm:txLinClrLst/>
+    <dgm:txFillClrLst meth="repeat">
+      <a:schemeClr val="dk1"/>
+    </dgm:txFillClrLst>
+    <dgm:txEffectClrLst/>
+  </dgm:styleLbl>
+  <dgm:styleLbl name="bgShp">
+    <dgm:fillClrLst meth="repeat">
+      <a:schemeClr val="accent5">
+        <a:tint val="40000"/>
+      </a:schemeClr>
+    </dgm:fillClrLst>
+    <dgm:linClrLst meth="repeat">
+      <a:schemeClr val="dk1"/>
+    </dgm:linClrLst>
+    <dgm:effectClrLst/>
+    <dgm:txLinClrLst/>
+    <dgm:txFillClrLst meth="repeat">
+      <a:schemeClr val="dk1"/>
+    </dgm:txFillClrLst>
+    <dgm:txEffectClrLst/>
+  </dgm:styleLbl>
+  <dgm:styleLbl name="dkBgShp">
+    <dgm:fillClrLst meth="repeat">
+      <a:schemeClr val="accent5">
+        <a:shade val="90000"/>
+      </a:schemeClr>
+    </dgm:fillClrLst>
+    <dgm:linClrLst meth="repeat">
+      <a:schemeClr val="dk1"/>
+    </dgm:linClrLst>
+    <dgm:effectClrLst/>
+    <dgm:txLinClrLst/>
+    <dgm:txFillClrLst meth="repeat">
+      <a:schemeClr val="lt1"/>
+    </dgm:txFillClrLst>
+    <dgm:txEffectClrLst/>
+  </dgm:styleLbl>
+  <dgm:styleLbl name="trBgShp">
+    <dgm:fillClrLst meth="repeat">
+      <a:schemeClr val="accent5">
+        <a:tint val="50000"/>
+        <a:alpha val="40000"/>
+      </a:schemeClr>
+    </dgm:fillClrLst>
+    <dgm:linClrLst meth="repeat">
+      <a:schemeClr val="accent5"/>
+    </dgm:linClrLst>
+    <dgm:effectClrLst/>
+    <dgm:txLinClrLst/>
+    <dgm:txFillClrLst meth="repeat">
+      <a:schemeClr val="lt1"/>
+    </dgm:txFillClrLst>
+    <dgm:txEffectClrLst/>
+  </dgm:styleLbl>
+  <dgm:styleLbl name="fgShp">
+    <dgm:fillClrLst meth="repeat">
+      <a:schemeClr val="accent5">
+        <a:tint val="40000"/>
+      </a:schemeClr>
+    </dgm:fillClrLst>
+    <dgm:linClrLst meth="repeat">
+      <a:schemeClr val="lt1"/>
+    </dgm:linClrLst>
+    <dgm:effectClrLst/>
+    <dgm:txLinClrLst/>
+    <dgm:txFillClrLst meth="repeat">
+      <a:schemeClr val="dk1"/>
+    </dgm:txFillClrLst>
+    <dgm:txEffectClrLst/>
+  </dgm:styleLbl>
+  <dgm:styleLbl name="revTx">
+    <dgm:fillClrLst meth="repeat">
+      <a:schemeClr val="lt1">
+        <a:alpha val="0"/>
+      </a:schemeClr>
+    </dgm:fillClrLst>
+    <dgm:linClrLst meth="repeat">
+      <a:schemeClr val="dk1">
+        <a:alpha val="0"/>
+      </a:schemeClr>
+    </dgm:linClrLst>
+    <dgm:effectClrLst/>
+    <dgm:txLinClrLst/>
+    <dgm:txFillClrLst meth="repeat">
+      <a:schemeClr val="tx1"/>
+    </dgm:txFillClrLst>
+    <dgm:txEffectClrLst/>
+  </dgm:styleLbl>
+</dgm:colorsDef>
+</file>
+
+<file path=ppt/diagrams/colors4.xml><?xml version="1.0" encoding="utf-8"?>
+<dgm:colorsDef xmlns:dgm="http://schemas.openxmlformats.org/drawingml/2006/diagram" xmlns:a="http://schemas.openxmlformats.org/drawingml/2006/main" uniqueId="urn:microsoft.com/office/officeart/2005/8/colors/accent2_1#1">
   <dgm:title val=""/>
   <dgm:desc val=""/>
   <dgm:catLst>
@@ -2676,7 +3459,7 @@
 <dgm:dataModel xmlns:dgm="http://schemas.openxmlformats.org/drawingml/2006/diagram" xmlns:a="http://schemas.openxmlformats.org/drawingml/2006/main">
   <dgm:ptLst>
     <dgm:pt modelId="{70B24189-73C9-4BFD-9BE4-F6E37D86C3B8}" type="doc">
-      <dgm:prSet loTypeId="urn:microsoft.com/office/officeart/2008/layout/LinedList" loCatId="list" qsTypeId="urn:microsoft.com/office/officeart/2005/8/quickstyle/simple1" qsCatId="simple" csTypeId="urn:microsoft.com/office/officeart/2005/8/colors/colorful2" csCatId="colorful"/>
+      <dgm:prSet loTypeId="urn:microsoft.com/office/officeart/2008/layout/LinedList" loCatId="list" qsTypeId="urn:microsoft.com/office/officeart/2005/8/quickstyle/simple1#3" qsCatId="simple" csTypeId="urn:microsoft.com/office/officeart/2005/8/colors/colorful2#1" csCatId="colorful"/>
       <dgm:spPr/>
       <dgm:t>
         <a:bodyPr/>
@@ -2946,7 +3729,7 @@
 <dgm:dataModel xmlns:dgm="http://schemas.openxmlformats.org/drawingml/2006/diagram" xmlns:a="http://schemas.openxmlformats.org/drawingml/2006/main">
   <dgm:ptLst>
     <dgm:pt modelId="{A056676A-1E1B-4123-93A8-65DC29E70FAE}" type="doc">
-      <dgm:prSet loTypeId="urn:microsoft.com/office/officeart/2018/2/layout/IconVerticalSolidList" loCatId="icon" qsTypeId="urn:microsoft.com/office/officeart/2005/8/quickstyle/simple1" qsCatId="simple" csTypeId="urn:microsoft.com/office/officeart/2018/5/colors/Iconchunking_neutralbg_colorful1" csCatId="colorful" phldr="1"/>
+      <dgm:prSet loTypeId="urn:microsoft.com/office/officeart/2018/2/layout/IconVerticalSolidList" loCatId="icon" qsTypeId="urn:microsoft.com/office/officeart/2005/8/quickstyle/simple1#4" qsCatId="simple" csTypeId="urn:microsoft.com/office/officeart/2018/5/colors/Iconchunking_neutralbg_colorful1" csCatId="colorful" phldr="1"/>
       <dgm:spPr/>
       <dgm:t>
         <a:bodyPr/>
@@ -3168,13 +3951,13 @@
       <dgm:prSet presAssocID="{5B518181-1F4E-4380-93AC-EE9A4592158A}" presName="iconRect" presStyleLbl="node1" presStyleIdx="0" presStyleCnt="4"/>
       <dgm:spPr>
         <a:blipFill>
-          <a:blip xmlns:r="http://schemas.openxmlformats.org/officeDocument/2006/relationships" r:embed="rId1">
+          <a:blip xmlns:r="http://schemas.openxmlformats.org/officeDocument/2006/relationships">
             <a:extLst>
               <a:ext uri="{28A0092B-C50C-407E-A947-70E740481C1C}">
                 <a14:useLocalDpi xmlns:a14="http://schemas.microsoft.com/office/drawing/2010/main" val="0"/>
               </a:ext>
               <a:ext uri="{96DAC541-7B7A-43D3-8B79-37D633B846F1}">
-                <asvg:svgBlip xmlns:asvg="http://schemas.microsoft.com/office/drawing/2016/SVG/main" r:embed="rId2"/>
+                <asvg:svgBlip xmlns:asvg="http://schemas.microsoft.com/office/drawing/2016/SVG/main" r:embed="rId1"/>
               </a:ext>
             </a:extLst>
           </a:blip>
@@ -3221,10 +4004,10 @@
       <dgm:prSet presAssocID="{42DCD5AB-802D-4664-9E7B-E27E96107EBB}" presName="iconRect" presStyleLbl="node1" presStyleIdx="1" presStyleCnt="4"/>
       <dgm:spPr>
         <a:blipFill>
-          <a:blip xmlns:r="http://schemas.openxmlformats.org/officeDocument/2006/relationships" r:embed="rId3">
+          <a:blip xmlns:r="http://schemas.openxmlformats.org/officeDocument/2006/relationships">
             <a:extLst>
               <a:ext uri="{96DAC541-7B7A-43D3-8B79-37D633B846F1}">
-                <asvg:svgBlip xmlns:asvg="http://schemas.microsoft.com/office/drawing/2016/SVG/main" r:embed="rId4"/>
+                <asvg:svgBlip xmlns:asvg="http://schemas.microsoft.com/office/drawing/2016/SVG/main" r:embed="rId2"/>
               </a:ext>
             </a:extLst>
           </a:blip>
@@ -3272,10 +4055,10 @@
       <dgm:prSet presAssocID="{72F7B30A-D280-4EC1-903B-6342C507FB27}" presName="iconRect" presStyleLbl="node1" presStyleIdx="2" presStyleCnt="4"/>
       <dgm:spPr>
         <a:blipFill>
-          <a:blip xmlns:r="http://schemas.openxmlformats.org/officeDocument/2006/relationships" r:embed="rId5">
+          <a:blip xmlns:r="http://schemas.openxmlformats.org/officeDocument/2006/relationships">
             <a:extLst>
               <a:ext uri="{96DAC541-7B7A-43D3-8B79-37D633B846F1}">
-                <asvg:svgBlip xmlns:asvg="http://schemas.microsoft.com/office/drawing/2016/SVG/main" r:embed="rId6"/>
+                <asvg:svgBlip xmlns:asvg="http://schemas.microsoft.com/office/drawing/2016/SVG/main" r:embed="rId3"/>
               </a:ext>
             </a:extLst>
           </a:blip>
@@ -3323,10 +4106,10 @@
       <dgm:prSet presAssocID="{BB99C48D-FE6C-4B0D-98D5-91D00D646C9B}" presName="iconRect" presStyleLbl="node1" presStyleIdx="3" presStyleCnt="4"/>
       <dgm:spPr>
         <a:blipFill>
-          <a:blip xmlns:r="http://schemas.openxmlformats.org/officeDocument/2006/relationships" r:embed="rId7">
+          <a:blip xmlns:r="http://schemas.openxmlformats.org/officeDocument/2006/relationships">
             <a:extLst>
               <a:ext uri="{96DAC541-7B7A-43D3-8B79-37D633B846F1}">
-                <asvg:svgBlip xmlns:asvg="http://schemas.microsoft.com/office/drawing/2016/SVG/main" r:embed="rId8"/>
+                <asvg:svgBlip xmlns:asvg="http://schemas.microsoft.com/office/drawing/2016/SVG/main" r:embed="rId4"/>
               </a:ext>
             </a:extLst>
           </a:blip>
@@ -3403,8 +4186,408 @@
 <file path=ppt/diagrams/data3.xml><?xml version="1.0" encoding="utf-8"?>
 <dgm:dataModel xmlns:dgm="http://schemas.openxmlformats.org/drawingml/2006/diagram" xmlns:a="http://schemas.openxmlformats.org/drawingml/2006/main">
   <dgm:ptLst>
+    <dgm:pt modelId="{1645593D-3302-43C0-A6AA-96B5852AD705}" type="doc">
+      <dgm:prSet loTypeId="urn:microsoft.com/office/officeart/2008/layout/LinedList" loCatId="list" qsTypeId="urn:microsoft.com/office/officeart/2005/8/quickstyle/simple1#5" qsCatId="simple" csTypeId="urn:microsoft.com/office/officeart/2005/8/colors/colorful5#2" csCatId="colorful" phldr="1"/>
+      <dgm:spPr/>
+      <dgm:t>
+        <a:bodyPr/>
+        <a:lstStyle/>
+        <a:p>
+          <a:endParaRPr lang="en-US"/>
+        </a:p>
+      </dgm:t>
+    </dgm:pt>
+    <dgm:pt modelId="{1B848B15-3F50-4078-939B-7197CEE5239A}">
+      <dgm:prSet/>
+      <dgm:spPr/>
+      <dgm:t>
+        <a:bodyPr/>
+        <a:lstStyle/>
+        <a:p>
+          <a:r>
+            <a:rPr lang="en-NL" b="0" i="0" baseline="0" dirty="0"/>
+            <a:t>I explored at least 3 IT topics, and AI was one of them.</a:t>
+          </a:r>
+          <a:endParaRPr lang="en-US" dirty="0"/>
+        </a:p>
+      </dgm:t>
+    </dgm:pt>
+    <dgm:pt modelId="{FFA011BE-3D83-46E1-B913-BFBFBD00E561}" type="parTrans" cxnId="{92FBA10D-238B-472B-9D3B-494052AD00AB}">
+      <dgm:prSet/>
+      <dgm:spPr/>
+      <dgm:t>
+        <a:bodyPr/>
+        <a:lstStyle/>
+        <a:p>
+          <a:endParaRPr lang="en-US"/>
+        </a:p>
+      </dgm:t>
+    </dgm:pt>
+    <dgm:pt modelId="{576DB206-5ED0-44D5-8D7E-FEDE296BDD43}" type="sibTrans" cxnId="{92FBA10D-238B-472B-9D3B-494052AD00AB}">
+      <dgm:prSet/>
+      <dgm:spPr/>
+      <dgm:t>
+        <a:bodyPr/>
+        <a:lstStyle/>
+        <a:p>
+          <a:endParaRPr lang="en-US"/>
+        </a:p>
+      </dgm:t>
+    </dgm:pt>
+    <dgm:pt modelId="{D42D0087-A62E-4968-AFFF-75A9EA2FE139}">
+      <dgm:prSet/>
+      <dgm:spPr/>
+      <dgm:t>
+        <a:bodyPr/>
+        <a:lstStyle/>
+        <a:p>
+          <a:r>
+            <a:rPr lang="en-NL" b="0" i="0" baseline="0" dirty="0"/>
+            <a:t>AI as a topic energized me and sparked my curiosity.</a:t>
+          </a:r>
+          <a:endParaRPr lang="en-US" dirty="0"/>
+        </a:p>
+      </dgm:t>
+    </dgm:pt>
+    <dgm:pt modelId="{E19AF98A-EACF-46C3-B1FD-8BD5E4ED768D}" type="parTrans" cxnId="{C36C8113-6649-49EE-82A2-334A5F133C79}">
+      <dgm:prSet/>
+      <dgm:spPr/>
+      <dgm:t>
+        <a:bodyPr/>
+        <a:lstStyle/>
+        <a:p>
+          <a:endParaRPr lang="en-US"/>
+        </a:p>
+      </dgm:t>
+    </dgm:pt>
+    <dgm:pt modelId="{DE1D391D-7F64-4760-8EA7-20E192C89B61}" type="sibTrans" cxnId="{C36C8113-6649-49EE-82A2-334A5F133C79}">
+      <dgm:prSet/>
+      <dgm:spPr/>
+      <dgm:t>
+        <a:bodyPr/>
+        <a:lstStyle/>
+        <a:p>
+          <a:endParaRPr lang="en-US"/>
+        </a:p>
+      </dgm:t>
+    </dgm:pt>
+    <dgm:pt modelId="{38D05C90-FD0C-47DA-B377-4486B86C9CD4}">
+      <dgm:prSet/>
+      <dgm:spPr/>
+      <dgm:t>
+        <a:bodyPr/>
+        <a:lstStyle/>
+        <a:p>
+          <a:r>
+            <a:rPr lang="en-NL" b="0" i="0" baseline="0" dirty="0"/>
+            <a:t>I can explain why I want to explore AI further.</a:t>
+          </a:r>
+          <a:endParaRPr lang="en-US" dirty="0"/>
+        </a:p>
+      </dgm:t>
+    </dgm:pt>
+    <dgm:pt modelId="{35341714-506B-4C7C-9721-96A201B3BEA5}" type="parTrans" cxnId="{C11EECAD-BBBF-4FCE-8298-FB61E738FE5F}">
+      <dgm:prSet/>
+      <dgm:spPr/>
+      <dgm:t>
+        <a:bodyPr/>
+        <a:lstStyle/>
+        <a:p>
+          <a:endParaRPr lang="en-US"/>
+        </a:p>
+      </dgm:t>
+    </dgm:pt>
+    <dgm:pt modelId="{870022CF-5E38-4E41-8F73-0F1B4139E44E}" type="sibTrans" cxnId="{C11EECAD-BBBF-4FCE-8298-FB61E738FE5F}">
+      <dgm:prSet/>
+      <dgm:spPr/>
+      <dgm:t>
+        <a:bodyPr/>
+        <a:lstStyle/>
+        <a:p>
+          <a:endParaRPr lang="en-US"/>
+        </a:p>
+      </dgm:t>
+    </dgm:pt>
+    <dgm:pt modelId="{31F334CF-B67E-44D7-9E87-A83EC64D279B}">
+      <dgm:prSet/>
+      <dgm:spPr/>
+      <dgm:t>
+        <a:bodyPr/>
+        <a:lstStyle/>
+        <a:p>
+          <a:r>
+            <a:rPr lang="en-NL" b="0" i="0" baseline="0" dirty="0"/>
+            <a:t>I have created a professional product that </a:t>
+          </a:r>
+          <a:r>
+            <a:rPr lang="en-US" b="0" i="0" baseline="0" dirty="0"/>
+            <a:t>an AI teacher validated</a:t>
+          </a:r>
+          <a:r>
+            <a:rPr lang="en-NL" b="0" i="0" baseline="0" dirty="0"/>
+            <a:t>.</a:t>
+          </a:r>
+          <a:endParaRPr lang="en-US" dirty="0"/>
+        </a:p>
+      </dgm:t>
+    </dgm:pt>
+    <dgm:pt modelId="{E9E08D18-3180-45FF-A138-583C4EA46A97}" type="parTrans" cxnId="{5A2589FF-2AC8-4A0F-994D-03C57E4A30E5}">
+      <dgm:prSet/>
+      <dgm:spPr/>
+      <dgm:t>
+        <a:bodyPr/>
+        <a:lstStyle/>
+        <a:p>
+          <a:endParaRPr lang="en-US"/>
+        </a:p>
+      </dgm:t>
+    </dgm:pt>
+    <dgm:pt modelId="{23A51396-B9AF-48B0-8F98-774003CEE88C}" type="sibTrans" cxnId="{5A2589FF-2AC8-4A0F-994D-03C57E4A30E5}">
+      <dgm:prSet/>
+      <dgm:spPr/>
+      <dgm:t>
+        <a:bodyPr/>
+        <a:lstStyle/>
+        <a:p>
+          <a:endParaRPr lang="en-US"/>
+        </a:p>
+      </dgm:t>
+    </dgm:pt>
+    <dgm:pt modelId="{4C6287BB-BD24-44F5-88DD-2C5DBA72E27B}">
+      <dgm:prSet/>
+      <dgm:spPr/>
+      <dgm:t>
+        <a:bodyPr/>
+        <a:lstStyle/>
+        <a:p>
+          <a:r>
+            <a:rPr lang="en-NL" b="0" i="0" baseline="0" dirty="0"/>
+            <a:t>I have researched the broader AI job market.</a:t>
+          </a:r>
+          <a:endParaRPr lang="en-US" dirty="0"/>
+        </a:p>
+      </dgm:t>
+    </dgm:pt>
+    <dgm:pt modelId="{57526F18-05E5-4221-B04A-5BDAEDD63206}" type="parTrans" cxnId="{6278027E-D2D3-491A-A06D-A0D4E21D063E}">
+      <dgm:prSet/>
+      <dgm:spPr/>
+      <dgm:t>
+        <a:bodyPr/>
+        <a:lstStyle/>
+        <a:p>
+          <a:endParaRPr lang="en-US"/>
+        </a:p>
+      </dgm:t>
+    </dgm:pt>
+    <dgm:pt modelId="{03D900D7-167C-4C61-9A7A-CB905B1E0CAB}" type="sibTrans" cxnId="{6278027E-D2D3-491A-A06D-A0D4E21D063E}">
+      <dgm:prSet/>
+      <dgm:spPr/>
+      <dgm:t>
+        <a:bodyPr/>
+        <a:lstStyle/>
+        <a:p>
+          <a:endParaRPr lang="en-US"/>
+        </a:p>
+      </dgm:t>
+    </dgm:pt>
+    <dgm:pt modelId="{99B31E3E-5BA5-4706-AC45-37C9E2A913A3}">
+      <dgm:prSet/>
+      <dgm:spPr/>
+      <dgm:t>
+        <a:bodyPr/>
+        <a:lstStyle/>
+        <a:p>
+          <a:r>
+            <a:rPr lang="en-NL" b="0" i="0" baseline="0" dirty="0"/>
+            <a:t>I have looked into Fontys ICT AI semesters and possibilities.</a:t>
+          </a:r>
+          <a:endParaRPr lang="en-US" dirty="0"/>
+        </a:p>
+      </dgm:t>
+    </dgm:pt>
+    <dgm:pt modelId="{A0380B80-BEA6-4045-AA16-41F0AB909E03}" type="parTrans" cxnId="{62CDA4CC-D8FF-4C7B-9718-14EBA69B21E0}">
+      <dgm:prSet/>
+      <dgm:spPr/>
+      <dgm:t>
+        <a:bodyPr/>
+        <a:lstStyle/>
+        <a:p>
+          <a:endParaRPr lang="en-US"/>
+        </a:p>
+      </dgm:t>
+    </dgm:pt>
+    <dgm:pt modelId="{72EE9171-8903-4FEF-B739-7F12EBFCC498}" type="sibTrans" cxnId="{62CDA4CC-D8FF-4C7B-9718-14EBA69B21E0}">
+      <dgm:prSet/>
+      <dgm:spPr/>
+      <dgm:t>
+        <a:bodyPr/>
+        <a:lstStyle/>
+        <a:p>
+          <a:endParaRPr lang="en-US"/>
+        </a:p>
+      </dgm:t>
+    </dgm:pt>
+    <dgm:pt modelId="{5D53E967-21BE-444D-B530-C9A910E5900C}" type="pres">
+      <dgm:prSet presAssocID="{1645593D-3302-43C0-A6AA-96B5852AD705}" presName="vert0" presStyleCnt="0">
+        <dgm:presLayoutVars>
+          <dgm:dir/>
+          <dgm:animOne val="branch"/>
+          <dgm:animLvl val="lvl"/>
+        </dgm:presLayoutVars>
+      </dgm:prSet>
+      <dgm:spPr/>
+    </dgm:pt>
+    <dgm:pt modelId="{26A4AA01-C708-433A-B885-0285C72A88A2}" type="pres">
+      <dgm:prSet presAssocID="{1B848B15-3F50-4078-939B-7197CEE5239A}" presName="thickLine" presStyleLbl="alignNode1" presStyleIdx="0" presStyleCnt="6"/>
+      <dgm:spPr/>
+    </dgm:pt>
+    <dgm:pt modelId="{D8C33B67-A81E-4A1F-BDCA-0F50C12C32E7}" type="pres">
+      <dgm:prSet presAssocID="{1B848B15-3F50-4078-939B-7197CEE5239A}" presName="horz1" presStyleCnt="0"/>
+      <dgm:spPr/>
+    </dgm:pt>
+    <dgm:pt modelId="{30022A4B-47E0-4B33-AA84-6110B85E5385}" type="pres">
+      <dgm:prSet presAssocID="{1B848B15-3F50-4078-939B-7197CEE5239A}" presName="tx1" presStyleLbl="revTx" presStyleIdx="0" presStyleCnt="6"/>
+      <dgm:spPr/>
+    </dgm:pt>
+    <dgm:pt modelId="{CA2E085B-BCFD-49B3-998A-7661B828716C}" type="pres">
+      <dgm:prSet presAssocID="{1B848B15-3F50-4078-939B-7197CEE5239A}" presName="vert1" presStyleCnt="0"/>
+      <dgm:spPr/>
+    </dgm:pt>
+    <dgm:pt modelId="{D433F511-F704-4F8D-967F-47139A5E9195}" type="pres">
+      <dgm:prSet presAssocID="{D42D0087-A62E-4968-AFFF-75A9EA2FE139}" presName="thickLine" presStyleLbl="alignNode1" presStyleIdx="1" presStyleCnt="6"/>
+      <dgm:spPr/>
+    </dgm:pt>
+    <dgm:pt modelId="{29E56A9A-91F6-4A24-A500-4CE6173A269B}" type="pres">
+      <dgm:prSet presAssocID="{D42D0087-A62E-4968-AFFF-75A9EA2FE139}" presName="horz1" presStyleCnt="0"/>
+      <dgm:spPr/>
+    </dgm:pt>
+    <dgm:pt modelId="{C01BFD03-8609-4DAB-84FF-A6476CE13A0A}" type="pres">
+      <dgm:prSet presAssocID="{D42D0087-A62E-4968-AFFF-75A9EA2FE139}" presName="tx1" presStyleLbl="revTx" presStyleIdx="1" presStyleCnt="6"/>
+      <dgm:spPr/>
+    </dgm:pt>
+    <dgm:pt modelId="{F540FE17-6A13-410D-BADD-198C0682FCB2}" type="pres">
+      <dgm:prSet presAssocID="{D42D0087-A62E-4968-AFFF-75A9EA2FE139}" presName="vert1" presStyleCnt="0"/>
+      <dgm:spPr/>
+    </dgm:pt>
+    <dgm:pt modelId="{C6EAA1D5-8636-482E-AFBA-CB92B9FBEB31}" type="pres">
+      <dgm:prSet presAssocID="{38D05C90-FD0C-47DA-B377-4486B86C9CD4}" presName="thickLine" presStyleLbl="alignNode1" presStyleIdx="2" presStyleCnt="6"/>
+      <dgm:spPr/>
+    </dgm:pt>
+    <dgm:pt modelId="{194B7A10-7776-4DD0-B529-64BFAB7A977E}" type="pres">
+      <dgm:prSet presAssocID="{38D05C90-FD0C-47DA-B377-4486B86C9CD4}" presName="horz1" presStyleCnt="0"/>
+      <dgm:spPr/>
+    </dgm:pt>
+    <dgm:pt modelId="{CDED7CEB-F7A8-49E9-B07E-4179D621453A}" type="pres">
+      <dgm:prSet presAssocID="{38D05C90-FD0C-47DA-B377-4486B86C9CD4}" presName="tx1" presStyleLbl="revTx" presStyleIdx="2" presStyleCnt="6"/>
+      <dgm:spPr/>
+    </dgm:pt>
+    <dgm:pt modelId="{361EBAE6-07E7-49D5-845F-82943F727C1E}" type="pres">
+      <dgm:prSet presAssocID="{38D05C90-FD0C-47DA-B377-4486B86C9CD4}" presName="vert1" presStyleCnt="0"/>
+      <dgm:spPr/>
+    </dgm:pt>
+    <dgm:pt modelId="{0EF30970-362D-4B10-A5AF-5498496F3FC8}" type="pres">
+      <dgm:prSet presAssocID="{31F334CF-B67E-44D7-9E87-A83EC64D279B}" presName="thickLine" presStyleLbl="alignNode1" presStyleIdx="3" presStyleCnt="6"/>
+      <dgm:spPr/>
+    </dgm:pt>
+    <dgm:pt modelId="{34EEB9A9-B309-434E-8889-D83A1ED157BF}" type="pres">
+      <dgm:prSet presAssocID="{31F334CF-B67E-44D7-9E87-A83EC64D279B}" presName="horz1" presStyleCnt="0"/>
+      <dgm:spPr/>
+    </dgm:pt>
+    <dgm:pt modelId="{DF375642-AA51-4451-957F-3C9BD1758BBD}" type="pres">
+      <dgm:prSet presAssocID="{31F334CF-B67E-44D7-9E87-A83EC64D279B}" presName="tx1" presStyleLbl="revTx" presStyleIdx="3" presStyleCnt="6"/>
+      <dgm:spPr/>
+    </dgm:pt>
+    <dgm:pt modelId="{5C1363AF-2F2A-42E3-91D6-CD4B8C3843FA}" type="pres">
+      <dgm:prSet presAssocID="{31F334CF-B67E-44D7-9E87-A83EC64D279B}" presName="vert1" presStyleCnt="0"/>
+      <dgm:spPr/>
+    </dgm:pt>
+    <dgm:pt modelId="{C40DD5C0-CEFF-4258-8C8E-8E4801ACFFE4}" type="pres">
+      <dgm:prSet presAssocID="{4C6287BB-BD24-44F5-88DD-2C5DBA72E27B}" presName="thickLine" presStyleLbl="alignNode1" presStyleIdx="4" presStyleCnt="6"/>
+      <dgm:spPr/>
+    </dgm:pt>
+    <dgm:pt modelId="{2A5B9FFD-9969-4B2C-A72C-C86590B97248}" type="pres">
+      <dgm:prSet presAssocID="{4C6287BB-BD24-44F5-88DD-2C5DBA72E27B}" presName="horz1" presStyleCnt="0"/>
+      <dgm:spPr/>
+    </dgm:pt>
+    <dgm:pt modelId="{CDC8CEA4-CC94-4062-B832-A1EDF60DB258}" type="pres">
+      <dgm:prSet presAssocID="{4C6287BB-BD24-44F5-88DD-2C5DBA72E27B}" presName="tx1" presStyleLbl="revTx" presStyleIdx="4" presStyleCnt="6"/>
+      <dgm:spPr/>
+    </dgm:pt>
+    <dgm:pt modelId="{FB2801C0-67E6-4346-9C40-56FF15531F6B}" type="pres">
+      <dgm:prSet presAssocID="{4C6287BB-BD24-44F5-88DD-2C5DBA72E27B}" presName="vert1" presStyleCnt="0"/>
+      <dgm:spPr/>
+    </dgm:pt>
+    <dgm:pt modelId="{CD4B0EE6-AC21-44E8-877C-3780B62AE8F9}" type="pres">
+      <dgm:prSet presAssocID="{99B31E3E-5BA5-4706-AC45-37C9E2A913A3}" presName="thickLine" presStyleLbl="alignNode1" presStyleIdx="5" presStyleCnt="6"/>
+      <dgm:spPr/>
+    </dgm:pt>
+    <dgm:pt modelId="{1A01CE48-5595-494A-87D1-8CC98FECF3AE}" type="pres">
+      <dgm:prSet presAssocID="{99B31E3E-5BA5-4706-AC45-37C9E2A913A3}" presName="horz1" presStyleCnt="0"/>
+      <dgm:spPr/>
+    </dgm:pt>
+    <dgm:pt modelId="{12E709D0-8298-4FD7-8271-C663A9CDE5CA}" type="pres">
+      <dgm:prSet presAssocID="{99B31E3E-5BA5-4706-AC45-37C9E2A913A3}" presName="tx1" presStyleLbl="revTx" presStyleIdx="5" presStyleCnt="6"/>
+      <dgm:spPr/>
+    </dgm:pt>
+    <dgm:pt modelId="{45AE6B40-63C2-4560-96AA-45A5E7098078}" type="pres">
+      <dgm:prSet presAssocID="{99B31E3E-5BA5-4706-AC45-37C9E2A913A3}" presName="vert1" presStyleCnt="0"/>
+      <dgm:spPr/>
+    </dgm:pt>
+  </dgm:ptLst>
+  <dgm:cxnLst>
+    <dgm:cxn modelId="{92FBA10D-238B-472B-9D3B-494052AD00AB}" srcId="{1645593D-3302-43C0-A6AA-96B5852AD705}" destId="{1B848B15-3F50-4078-939B-7197CEE5239A}" srcOrd="0" destOrd="0" parTransId="{FFA011BE-3D83-46E1-B913-BFBFBD00E561}" sibTransId="{576DB206-5ED0-44D5-8D7E-FEDE296BDD43}"/>
+    <dgm:cxn modelId="{C36C8113-6649-49EE-82A2-334A5F133C79}" srcId="{1645593D-3302-43C0-A6AA-96B5852AD705}" destId="{D42D0087-A62E-4968-AFFF-75A9EA2FE139}" srcOrd="1" destOrd="0" parTransId="{E19AF98A-EACF-46C3-B1FD-8BD5E4ED768D}" sibTransId="{DE1D391D-7F64-4760-8EA7-20E192C89B61}"/>
+    <dgm:cxn modelId="{77FA7C1D-5061-4F9F-B2E3-18F3ECAD0C9B}" type="presOf" srcId="{1645593D-3302-43C0-A6AA-96B5852AD705}" destId="{5D53E967-21BE-444D-B530-C9A910E5900C}" srcOrd="0" destOrd="0" presId="urn:microsoft.com/office/officeart/2008/layout/LinedList"/>
+    <dgm:cxn modelId="{29E66628-8CE3-430A-8823-C7EACFC78C0F}" type="presOf" srcId="{99B31E3E-5BA5-4706-AC45-37C9E2A913A3}" destId="{12E709D0-8298-4FD7-8271-C663A9CDE5CA}" srcOrd="0" destOrd="0" presId="urn:microsoft.com/office/officeart/2008/layout/LinedList"/>
+    <dgm:cxn modelId="{6004A258-1B88-48D2-B31B-66353B4B30A8}" type="presOf" srcId="{31F334CF-B67E-44D7-9E87-A83EC64D279B}" destId="{DF375642-AA51-4451-957F-3C9BD1758BBD}" srcOrd="0" destOrd="0" presId="urn:microsoft.com/office/officeart/2008/layout/LinedList"/>
+    <dgm:cxn modelId="{E9B01A63-F0EC-491E-B84F-2557AC2B5A23}" type="presOf" srcId="{D42D0087-A62E-4968-AFFF-75A9EA2FE139}" destId="{C01BFD03-8609-4DAB-84FF-A6476CE13A0A}" srcOrd="0" destOrd="0" presId="urn:microsoft.com/office/officeart/2008/layout/LinedList"/>
+    <dgm:cxn modelId="{6278027E-D2D3-491A-A06D-A0D4E21D063E}" srcId="{1645593D-3302-43C0-A6AA-96B5852AD705}" destId="{4C6287BB-BD24-44F5-88DD-2C5DBA72E27B}" srcOrd="4" destOrd="0" parTransId="{57526F18-05E5-4221-B04A-5BDAEDD63206}" sibTransId="{03D900D7-167C-4C61-9A7A-CB905B1E0CAB}"/>
+    <dgm:cxn modelId="{C11EECAD-BBBF-4FCE-8298-FB61E738FE5F}" srcId="{1645593D-3302-43C0-A6AA-96B5852AD705}" destId="{38D05C90-FD0C-47DA-B377-4486B86C9CD4}" srcOrd="2" destOrd="0" parTransId="{35341714-506B-4C7C-9721-96A201B3BEA5}" sibTransId="{870022CF-5E38-4E41-8F73-0F1B4139E44E}"/>
+    <dgm:cxn modelId="{F86544C7-26ED-475A-AF21-81006D79D68B}" type="presOf" srcId="{4C6287BB-BD24-44F5-88DD-2C5DBA72E27B}" destId="{CDC8CEA4-CC94-4062-B832-A1EDF60DB258}" srcOrd="0" destOrd="0" presId="urn:microsoft.com/office/officeart/2008/layout/LinedList"/>
+    <dgm:cxn modelId="{62CDA4CC-D8FF-4C7B-9718-14EBA69B21E0}" srcId="{1645593D-3302-43C0-A6AA-96B5852AD705}" destId="{99B31E3E-5BA5-4706-AC45-37C9E2A913A3}" srcOrd="5" destOrd="0" parTransId="{A0380B80-BEA6-4045-AA16-41F0AB909E03}" sibTransId="{72EE9171-8903-4FEF-B739-7F12EBFCC498}"/>
+    <dgm:cxn modelId="{E29155E0-9A7E-4530-98AF-3B02CCCD94BB}" type="presOf" srcId="{38D05C90-FD0C-47DA-B377-4486B86C9CD4}" destId="{CDED7CEB-F7A8-49E9-B07E-4179D621453A}" srcOrd="0" destOrd="0" presId="urn:microsoft.com/office/officeart/2008/layout/LinedList"/>
+    <dgm:cxn modelId="{8E06FBEA-DA61-4C92-9C10-3B61EEEF1ACD}" type="presOf" srcId="{1B848B15-3F50-4078-939B-7197CEE5239A}" destId="{30022A4B-47E0-4B33-AA84-6110B85E5385}" srcOrd="0" destOrd="0" presId="urn:microsoft.com/office/officeart/2008/layout/LinedList"/>
+    <dgm:cxn modelId="{5A2589FF-2AC8-4A0F-994D-03C57E4A30E5}" srcId="{1645593D-3302-43C0-A6AA-96B5852AD705}" destId="{31F334CF-B67E-44D7-9E87-A83EC64D279B}" srcOrd="3" destOrd="0" parTransId="{E9E08D18-3180-45FF-A138-583C4EA46A97}" sibTransId="{23A51396-B9AF-48B0-8F98-774003CEE88C}"/>
+    <dgm:cxn modelId="{49AB6D14-A6C2-4BE2-8732-EF842BA6FCD7}" type="presParOf" srcId="{5D53E967-21BE-444D-B530-C9A910E5900C}" destId="{26A4AA01-C708-433A-B885-0285C72A88A2}" srcOrd="0" destOrd="0" presId="urn:microsoft.com/office/officeart/2008/layout/LinedList"/>
+    <dgm:cxn modelId="{1AC4A0D6-2D1A-463E-8AD9-282CE59F76AA}" type="presParOf" srcId="{5D53E967-21BE-444D-B530-C9A910E5900C}" destId="{D8C33B67-A81E-4A1F-BDCA-0F50C12C32E7}" srcOrd="1" destOrd="0" presId="urn:microsoft.com/office/officeart/2008/layout/LinedList"/>
+    <dgm:cxn modelId="{1F9EE57F-5D63-407F-8246-C95AEE2EED87}" type="presParOf" srcId="{D8C33B67-A81E-4A1F-BDCA-0F50C12C32E7}" destId="{30022A4B-47E0-4B33-AA84-6110B85E5385}" srcOrd="0" destOrd="0" presId="urn:microsoft.com/office/officeart/2008/layout/LinedList"/>
+    <dgm:cxn modelId="{2F63C54B-2B6A-43E2-9EB2-194DBB902678}" type="presParOf" srcId="{D8C33B67-A81E-4A1F-BDCA-0F50C12C32E7}" destId="{CA2E085B-BCFD-49B3-998A-7661B828716C}" srcOrd="1" destOrd="0" presId="urn:microsoft.com/office/officeart/2008/layout/LinedList"/>
+    <dgm:cxn modelId="{8591811B-8B18-4D6F-BB6B-A89BD40070E9}" type="presParOf" srcId="{5D53E967-21BE-444D-B530-C9A910E5900C}" destId="{D433F511-F704-4F8D-967F-47139A5E9195}" srcOrd="2" destOrd="0" presId="urn:microsoft.com/office/officeart/2008/layout/LinedList"/>
+    <dgm:cxn modelId="{8A8A955F-A925-444D-B8D0-AB4CBDE856F8}" type="presParOf" srcId="{5D53E967-21BE-444D-B530-C9A910E5900C}" destId="{29E56A9A-91F6-4A24-A500-4CE6173A269B}" srcOrd="3" destOrd="0" presId="urn:microsoft.com/office/officeart/2008/layout/LinedList"/>
+    <dgm:cxn modelId="{568C3647-6284-4589-871D-C17398C2C265}" type="presParOf" srcId="{29E56A9A-91F6-4A24-A500-4CE6173A269B}" destId="{C01BFD03-8609-4DAB-84FF-A6476CE13A0A}" srcOrd="0" destOrd="0" presId="urn:microsoft.com/office/officeart/2008/layout/LinedList"/>
+    <dgm:cxn modelId="{AB316301-5611-4FCF-B10B-E3D91FA80CB4}" type="presParOf" srcId="{29E56A9A-91F6-4A24-A500-4CE6173A269B}" destId="{F540FE17-6A13-410D-BADD-198C0682FCB2}" srcOrd="1" destOrd="0" presId="urn:microsoft.com/office/officeart/2008/layout/LinedList"/>
+    <dgm:cxn modelId="{64C60568-E862-41AC-AF91-2C92732DBAD6}" type="presParOf" srcId="{5D53E967-21BE-444D-B530-C9A910E5900C}" destId="{C6EAA1D5-8636-482E-AFBA-CB92B9FBEB31}" srcOrd="4" destOrd="0" presId="urn:microsoft.com/office/officeart/2008/layout/LinedList"/>
+    <dgm:cxn modelId="{77E5B161-17D9-42C6-874E-4F6B3CC95DF1}" type="presParOf" srcId="{5D53E967-21BE-444D-B530-C9A910E5900C}" destId="{194B7A10-7776-4DD0-B529-64BFAB7A977E}" srcOrd="5" destOrd="0" presId="urn:microsoft.com/office/officeart/2008/layout/LinedList"/>
+    <dgm:cxn modelId="{A176DCBC-52A7-47FD-8BFD-539C25816714}" type="presParOf" srcId="{194B7A10-7776-4DD0-B529-64BFAB7A977E}" destId="{CDED7CEB-F7A8-49E9-B07E-4179D621453A}" srcOrd="0" destOrd="0" presId="urn:microsoft.com/office/officeart/2008/layout/LinedList"/>
+    <dgm:cxn modelId="{84E36718-28D6-421C-82C0-D6CE1E72DF6A}" type="presParOf" srcId="{194B7A10-7776-4DD0-B529-64BFAB7A977E}" destId="{361EBAE6-07E7-49D5-845F-82943F727C1E}" srcOrd="1" destOrd="0" presId="urn:microsoft.com/office/officeart/2008/layout/LinedList"/>
+    <dgm:cxn modelId="{0088068F-F53D-4958-A8C9-1869C0CCA3AE}" type="presParOf" srcId="{5D53E967-21BE-444D-B530-C9A910E5900C}" destId="{0EF30970-362D-4B10-A5AF-5498496F3FC8}" srcOrd="6" destOrd="0" presId="urn:microsoft.com/office/officeart/2008/layout/LinedList"/>
+    <dgm:cxn modelId="{8622B7C7-90CF-40F8-BED1-F713269A125D}" type="presParOf" srcId="{5D53E967-21BE-444D-B530-C9A910E5900C}" destId="{34EEB9A9-B309-434E-8889-D83A1ED157BF}" srcOrd="7" destOrd="0" presId="urn:microsoft.com/office/officeart/2008/layout/LinedList"/>
+    <dgm:cxn modelId="{79BA2D08-E027-4979-8B2D-50165E0E517B}" type="presParOf" srcId="{34EEB9A9-B309-434E-8889-D83A1ED157BF}" destId="{DF375642-AA51-4451-957F-3C9BD1758BBD}" srcOrd="0" destOrd="0" presId="urn:microsoft.com/office/officeart/2008/layout/LinedList"/>
+    <dgm:cxn modelId="{88AED797-3448-4A30-8D74-1D178FE911B4}" type="presParOf" srcId="{34EEB9A9-B309-434E-8889-D83A1ED157BF}" destId="{5C1363AF-2F2A-42E3-91D6-CD4B8C3843FA}" srcOrd="1" destOrd="0" presId="urn:microsoft.com/office/officeart/2008/layout/LinedList"/>
+    <dgm:cxn modelId="{9EBC73B4-3A1D-4BA1-9AE4-7E6A9649E933}" type="presParOf" srcId="{5D53E967-21BE-444D-B530-C9A910E5900C}" destId="{C40DD5C0-CEFF-4258-8C8E-8E4801ACFFE4}" srcOrd="8" destOrd="0" presId="urn:microsoft.com/office/officeart/2008/layout/LinedList"/>
+    <dgm:cxn modelId="{E5C4769C-4E14-443A-B306-76345771E862}" type="presParOf" srcId="{5D53E967-21BE-444D-B530-C9A910E5900C}" destId="{2A5B9FFD-9969-4B2C-A72C-C86590B97248}" srcOrd="9" destOrd="0" presId="urn:microsoft.com/office/officeart/2008/layout/LinedList"/>
+    <dgm:cxn modelId="{399CFF72-9F78-45BF-8E7E-F5976EA3DD22}" type="presParOf" srcId="{2A5B9FFD-9969-4B2C-A72C-C86590B97248}" destId="{CDC8CEA4-CC94-4062-B832-A1EDF60DB258}" srcOrd="0" destOrd="0" presId="urn:microsoft.com/office/officeart/2008/layout/LinedList"/>
+    <dgm:cxn modelId="{EA5F335E-F423-40FD-B078-7D48331FEB88}" type="presParOf" srcId="{2A5B9FFD-9969-4B2C-A72C-C86590B97248}" destId="{FB2801C0-67E6-4346-9C40-56FF15531F6B}" srcOrd="1" destOrd="0" presId="urn:microsoft.com/office/officeart/2008/layout/LinedList"/>
+    <dgm:cxn modelId="{4B5D0F80-2FD8-407A-9894-E443B6FA13F1}" type="presParOf" srcId="{5D53E967-21BE-444D-B530-C9A910E5900C}" destId="{CD4B0EE6-AC21-44E8-877C-3780B62AE8F9}" srcOrd="10" destOrd="0" presId="urn:microsoft.com/office/officeart/2008/layout/LinedList"/>
+    <dgm:cxn modelId="{28E2CF21-547A-408F-89AE-B8857A47AF84}" type="presParOf" srcId="{5D53E967-21BE-444D-B530-C9A910E5900C}" destId="{1A01CE48-5595-494A-87D1-8CC98FECF3AE}" srcOrd="11" destOrd="0" presId="urn:microsoft.com/office/officeart/2008/layout/LinedList"/>
+    <dgm:cxn modelId="{FF377DAD-A5EB-40D4-BF25-208F3AACB7CB}" type="presParOf" srcId="{1A01CE48-5595-494A-87D1-8CC98FECF3AE}" destId="{12E709D0-8298-4FD7-8271-C663A9CDE5CA}" srcOrd="0" destOrd="0" presId="urn:microsoft.com/office/officeart/2008/layout/LinedList"/>
+    <dgm:cxn modelId="{918A0F46-AD58-4C7E-BFA0-0B0EAD441599}" type="presParOf" srcId="{1A01CE48-5595-494A-87D1-8CC98FECF3AE}" destId="{45AE6B40-63C2-4560-96AA-45A5E7098078}" srcOrd="1" destOrd="0" presId="urn:microsoft.com/office/officeart/2008/layout/LinedList"/>
+  </dgm:cxnLst>
+  <dgm:bg/>
+  <dgm:whole/>
+  <dgm:extLst>
+    <a:ext uri="http://schemas.microsoft.com/office/drawing/2008/diagram">
+      <dsp:dataModelExt xmlns:dsp="http://schemas.microsoft.com/office/drawing/2008/diagram" relId="rId6" minVer="http://schemas.openxmlformats.org/drawingml/2006/diagram"/>
+    </a:ext>
+  </dgm:extLst>
+</dgm:dataModel>
+</file>
+
+<file path=ppt/diagrams/data4.xml><?xml version="1.0" encoding="utf-8"?>
+<dgm:dataModel xmlns:dgm="http://schemas.openxmlformats.org/drawingml/2006/diagram" xmlns:a="http://schemas.openxmlformats.org/drawingml/2006/main">
+  <dgm:ptLst>
     <dgm:pt modelId="{0B759015-8B4D-445E-9488-ACF536ECEF45}" type="doc">
-      <dgm:prSet loTypeId="urn:microsoft.com/office/officeart/2005/8/layout/default" loCatId="list" qsTypeId="urn:microsoft.com/office/officeart/2005/8/quickstyle/3d2" qsCatId="3D" csTypeId="urn:microsoft.com/office/officeart/2005/8/colors/accent2_1" csCatId="accent2" phldr="1"/>
+      <dgm:prSet loTypeId="urn:microsoft.com/office/officeart/2005/8/layout/default" loCatId="list" qsTypeId="urn:microsoft.com/office/officeart/2005/8/quickstyle/3d2#1" qsCatId="3D" csTypeId="urn:microsoft.com/office/officeart/2005/8/colors/accent2_1#1" csCatId="accent2" phldr="1"/>
       <dgm:spPr/>
       <dgm:t>
         <a:bodyPr/>
@@ -4316,13 +5499,13 @@
           <a:avLst/>
         </a:prstGeom>
         <a:blipFill>
-          <a:blip xmlns:r="http://schemas.openxmlformats.org/officeDocument/2006/relationships" r:embed="rId1">
+          <a:blip xmlns:r="http://schemas.openxmlformats.org/officeDocument/2006/relationships">
             <a:extLst>
               <a:ext uri="{28A0092B-C50C-407E-A947-70E740481C1C}">
                 <a14:useLocalDpi xmlns:a14="http://schemas.microsoft.com/office/drawing/2010/main" val="0"/>
               </a:ext>
               <a:ext uri="{96DAC541-7B7A-43D3-8B79-37D633B846F1}">
-                <asvg:svgBlip xmlns:asvg="http://schemas.microsoft.com/office/drawing/2016/SVG/main" r:embed="rId2"/>
+                <asvg:svgBlip xmlns:asvg="http://schemas.microsoft.com/office/drawing/2016/SVG/main" r:embed="rId1"/>
               </a:ext>
             </a:extLst>
           </a:blip>
@@ -4473,10 +5656,10 @@
           <a:avLst/>
         </a:prstGeom>
         <a:blipFill>
-          <a:blip xmlns:r="http://schemas.openxmlformats.org/officeDocument/2006/relationships" r:embed="rId3">
+          <a:blip xmlns:r="http://schemas.openxmlformats.org/officeDocument/2006/relationships">
             <a:extLst>
               <a:ext uri="{96DAC541-7B7A-43D3-8B79-37D633B846F1}">
-                <asvg:svgBlip xmlns:asvg="http://schemas.microsoft.com/office/drawing/2016/SVG/main" r:embed="rId4"/>
+                <asvg:svgBlip xmlns:asvg="http://schemas.microsoft.com/office/drawing/2016/SVG/main" r:embed="rId2"/>
               </a:ext>
             </a:extLst>
           </a:blip>
@@ -4628,10 +5811,10 @@
           <a:avLst/>
         </a:prstGeom>
         <a:blipFill>
-          <a:blip xmlns:r="http://schemas.openxmlformats.org/officeDocument/2006/relationships" r:embed="rId5">
+          <a:blip xmlns:r="http://schemas.openxmlformats.org/officeDocument/2006/relationships">
             <a:extLst>
               <a:ext uri="{96DAC541-7B7A-43D3-8B79-37D633B846F1}">
-                <asvg:svgBlip xmlns:asvg="http://schemas.microsoft.com/office/drawing/2016/SVG/main" r:embed="rId6"/>
+                <asvg:svgBlip xmlns:asvg="http://schemas.microsoft.com/office/drawing/2016/SVG/main" r:embed="rId3"/>
               </a:ext>
             </a:extLst>
           </a:blip>
@@ -4791,10 +5974,10 @@
           <a:avLst/>
         </a:prstGeom>
         <a:blipFill>
-          <a:blip xmlns:r="http://schemas.openxmlformats.org/officeDocument/2006/relationships" r:embed="rId7">
+          <a:blip xmlns:r="http://schemas.openxmlformats.org/officeDocument/2006/relationships">
             <a:extLst>
               <a:ext uri="{96DAC541-7B7A-43D3-8B79-37D633B846F1}">
-                <asvg:svgBlip xmlns:asvg="http://schemas.microsoft.com/office/drawing/2016/SVG/main" r:embed="rId8"/>
+                <asvg:svgBlip xmlns:asvg="http://schemas.microsoft.com/office/drawing/2016/SVG/main" r:embed="rId4"/>
               </a:ext>
             </a:extLst>
           </a:blip>
@@ -4902,6 +6085,692 @@
 </file>
 
 <file path=ppt/diagrams/drawing3.xml><?xml version="1.0" encoding="utf-8"?>
+<dsp:drawing xmlns:dgm="http://schemas.openxmlformats.org/drawingml/2006/diagram" xmlns:dsp="http://schemas.microsoft.com/office/drawing/2008/diagram" xmlns:a="http://schemas.openxmlformats.org/drawingml/2006/main">
+  <dsp:spTree>
+    <dsp:nvGrpSpPr>
+      <dsp:cNvPr id="0" name=""/>
+      <dsp:cNvGrpSpPr/>
+    </dsp:nvGrpSpPr>
+    <dsp:grpSpPr/>
+    <dsp:sp modelId="{26A4AA01-C708-433A-B885-0285C72A88A2}">
+      <dsp:nvSpPr>
+        <dsp:cNvPr id="0" name=""/>
+        <dsp:cNvSpPr/>
+      </dsp:nvSpPr>
+      <dsp:spPr>
+        <a:xfrm>
+          <a:off x="0" y="2687"/>
+          <a:ext cx="6263640" cy="0"/>
+        </a:xfrm>
+        <a:prstGeom prst="line">
+          <a:avLst/>
+        </a:prstGeom>
+        <a:solidFill>
+          <a:schemeClr val="accent5">
+            <a:hueOff val="0"/>
+            <a:satOff val="0"/>
+            <a:lumOff val="0"/>
+            <a:alphaOff val="0"/>
+          </a:schemeClr>
+        </a:solidFill>
+        <a:ln w="19050" cap="flat" cmpd="sng" algn="ctr">
+          <a:solidFill>
+            <a:schemeClr val="accent5">
+              <a:hueOff val="0"/>
+              <a:satOff val="0"/>
+              <a:lumOff val="0"/>
+              <a:alphaOff val="0"/>
+            </a:schemeClr>
+          </a:solidFill>
+          <a:prstDash val="solid"/>
+          <a:miter lim="800000"/>
+        </a:ln>
+        <a:effectLst/>
+      </dsp:spPr>
+      <dsp:style>
+        <a:lnRef idx="2">
+          <a:scrgbClr r="0" g="0" b="0"/>
+        </a:lnRef>
+        <a:fillRef idx="1">
+          <a:scrgbClr r="0" g="0" b="0"/>
+        </a:fillRef>
+        <a:effectRef idx="0">
+          <a:scrgbClr r="0" g="0" b="0"/>
+        </a:effectRef>
+        <a:fontRef idx="minor">
+          <a:schemeClr val="lt1"/>
+        </a:fontRef>
+      </dsp:style>
+    </dsp:sp>
+    <dsp:sp modelId="{30022A4B-47E0-4B33-AA84-6110B85E5385}">
+      <dsp:nvSpPr>
+        <dsp:cNvPr id="0" name=""/>
+        <dsp:cNvSpPr/>
+      </dsp:nvSpPr>
+      <dsp:spPr>
+        <a:xfrm>
+          <a:off x="0" y="2687"/>
+          <a:ext cx="6263640" cy="916552"/>
+        </a:xfrm>
+        <a:prstGeom prst="rect">
+          <a:avLst/>
+        </a:prstGeom>
+        <a:noFill/>
+        <a:ln>
+          <a:noFill/>
+        </a:ln>
+        <a:effectLst/>
+      </dsp:spPr>
+      <dsp:style>
+        <a:lnRef idx="0">
+          <a:scrgbClr r="0" g="0" b="0"/>
+        </a:lnRef>
+        <a:fillRef idx="0">
+          <a:scrgbClr r="0" g="0" b="0"/>
+        </a:fillRef>
+        <a:effectRef idx="0">
+          <a:scrgbClr r="0" g="0" b="0"/>
+        </a:effectRef>
+        <a:fontRef idx="minor"/>
+      </dsp:style>
+      <dsp:txBody>
+        <a:bodyPr spcFirstLastPara="0" vert="horz" wrap="square" lIns="99060" tIns="99060" rIns="99060" bIns="99060" numCol="1" spcCol="1270" anchor="t" anchorCtr="0">
+          <a:noAutofit/>
+        </a:bodyPr>
+        <a:lstStyle/>
+        <a:p>
+          <a:pPr marL="0" lvl="0" indent="0" algn="l" defTabSz="1155700">
+            <a:lnSpc>
+              <a:spcPct val="90000"/>
+            </a:lnSpc>
+            <a:spcBef>
+              <a:spcPct val="0"/>
+            </a:spcBef>
+            <a:spcAft>
+              <a:spcPct val="35000"/>
+            </a:spcAft>
+            <a:buNone/>
+          </a:pPr>
+          <a:r>
+            <a:rPr lang="en-NL" sz="2600" b="0" i="0" kern="1200" baseline="0" dirty="0"/>
+            <a:t>I explored at least 3 IT topics, and AI was one of them.</a:t>
+          </a:r>
+          <a:endParaRPr lang="en-US" sz="2600" kern="1200" dirty="0"/>
+        </a:p>
+      </dsp:txBody>
+      <dsp:txXfrm>
+        <a:off x="0" y="2687"/>
+        <a:ext cx="6263640" cy="916552"/>
+      </dsp:txXfrm>
+    </dsp:sp>
+    <dsp:sp modelId="{D433F511-F704-4F8D-967F-47139A5E9195}">
+      <dsp:nvSpPr>
+        <dsp:cNvPr id="0" name=""/>
+        <dsp:cNvSpPr/>
+      </dsp:nvSpPr>
+      <dsp:spPr>
+        <a:xfrm>
+          <a:off x="0" y="919239"/>
+          <a:ext cx="6263640" cy="0"/>
+        </a:xfrm>
+        <a:prstGeom prst="line">
+          <a:avLst/>
+        </a:prstGeom>
+        <a:solidFill>
+          <a:schemeClr val="accent5">
+            <a:hueOff val="1675080"/>
+            <a:satOff val="179"/>
+            <a:lumOff val="-3451"/>
+            <a:alphaOff val="0"/>
+          </a:schemeClr>
+        </a:solidFill>
+        <a:ln w="19050" cap="flat" cmpd="sng" algn="ctr">
+          <a:solidFill>
+            <a:schemeClr val="accent5">
+              <a:hueOff val="1675080"/>
+              <a:satOff val="179"/>
+              <a:lumOff val="-3451"/>
+              <a:alphaOff val="0"/>
+            </a:schemeClr>
+          </a:solidFill>
+          <a:prstDash val="solid"/>
+          <a:miter lim="800000"/>
+        </a:ln>
+        <a:effectLst/>
+      </dsp:spPr>
+      <dsp:style>
+        <a:lnRef idx="2">
+          <a:scrgbClr r="0" g="0" b="0"/>
+        </a:lnRef>
+        <a:fillRef idx="1">
+          <a:scrgbClr r="0" g="0" b="0"/>
+        </a:fillRef>
+        <a:effectRef idx="0">
+          <a:scrgbClr r="0" g="0" b="0"/>
+        </a:effectRef>
+        <a:fontRef idx="minor">
+          <a:schemeClr val="lt1"/>
+        </a:fontRef>
+      </dsp:style>
+    </dsp:sp>
+    <dsp:sp modelId="{C01BFD03-8609-4DAB-84FF-A6476CE13A0A}">
+      <dsp:nvSpPr>
+        <dsp:cNvPr id="0" name=""/>
+        <dsp:cNvSpPr/>
+      </dsp:nvSpPr>
+      <dsp:spPr>
+        <a:xfrm>
+          <a:off x="0" y="919239"/>
+          <a:ext cx="6263640" cy="916552"/>
+        </a:xfrm>
+        <a:prstGeom prst="rect">
+          <a:avLst/>
+        </a:prstGeom>
+        <a:noFill/>
+        <a:ln>
+          <a:noFill/>
+        </a:ln>
+        <a:effectLst/>
+      </dsp:spPr>
+      <dsp:style>
+        <a:lnRef idx="0">
+          <a:scrgbClr r="0" g="0" b="0"/>
+        </a:lnRef>
+        <a:fillRef idx="0">
+          <a:scrgbClr r="0" g="0" b="0"/>
+        </a:fillRef>
+        <a:effectRef idx="0">
+          <a:scrgbClr r="0" g="0" b="0"/>
+        </a:effectRef>
+        <a:fontRef idx="minor"/>
+      </dsp:style>
+      <dsp:txBody>
+        <a:bodyPr spcFirstLastPara="0" vert="horz" wrap="square" lIns="99060" tIns="99060" rIns="99060" bIns="99060" numCol="1" spcCol="1270" anchor="t" anchorCtr="0">
+          <a:noAutofit/>
+        </a:bodyPr>
+        <a:lstStyle/>
+        <a:p>
+          <a:pPr marL="0" lvl="0" indent="0" algn="l" defTabSz="1155700">
+            <a:lnSpc>
+              <a:spcPct val="90000"/>
+            </a:lnSpc>
+            <a:spcBef>
+              <a:spcPct val="0"/>
+            </a:spcBef>
+            <a:spcAft>
+              <a:spcPct val="35000"/>
+            </a:spcAft>
+            <a:buNone/>
+          </a:pPr>
+          <a:r>
+            <a:rPr lang="en-NL" sz="2600" b="0" i="0" kern="1200" baseline="0" dirty="0"/>
+            <a:t>AI as a topic energized me and sparked my curiosity.</a:t>
+          </a:r>
+          <a:endParaRPr lang="en-US" sz="2600" kern="1200" dirty="0"/>
+        </a:p>
+      </dsp:txBody>
+      <dsp:txXfrm>
+        <a:off x="0" y="919239"/>
+        <a:ext cx="6263640" cy="916552"/>
+      </dsp:txXfrm>
+    </dsp:sp>
+    <dsp:sp modelId="{C6EAA1D5-8636-482E-AFBA-CB92B9FBEB31}">
+      <dsp:nvSpPr>
+        <dsp:cNvPr id="0" name=""/>
+        <dsp:cNvSpPr/>
+      </dsp:nvSpPr>
+      <dsp:spPr>
+        <a:xfrm>
+          <a:off x="0" y="1835791"/>
+          <a:ext cx="6263640" cy="0"/>
+        </a:xfrm>
+        <a:prstGeom prst="line">
+          <a:avLst/>
+        </a:prstGeom>
+        <a:solidFill>
+          <a:schemeClr val="accent5">
+            <a:hueOff val="3350161"/>
+            <a:satOff val="359"/>
+            <a:lumOff val="-6902"/>
+            <a:alphaOff val="0"/>
+          </a:schemeClr>
+        </a:solidFill>
+        <a:ln w="19050" cap="flat" cmpd="sng" algn="ctr">
+          <a:solidFill>
+            <a:schemeClr val="accent5">
+              <a:hueOff val="3350161"/>
+              <a:satOff val="359"/>
+              <a:lumOff val="-6902"/>
+              <a:alphaOff val="0"/>
+            </a:schemeClr>
+          </a:solidFill>
+          <a:prstDash val="solid"/>
+          <a:miter lim="800000"/>
+        </a:ln>
+        <a:effectLst/>
+      </dsp:spPr>
+      <dsp:style>
+        <a:lnRef idx="2">
+          <a:scrgbClr r="0" g="0" b="0"/>
+        </a:lnRef>
+        <a:fillRef idx="1">
+          <a:scrgbClr r="0" g="0" b="0"/>
+        </a:fillRef>
+        <a:effectRef idx="0">
+          <a:scrgbClr r="0" g="0" b="0"/>
+        </a:effectRef>
+        <a:fontRef idx="minor">
+          <a:schemeClr val="lt1"/>
+        </a:fontRef>
+      </dsp:style>
+    </dsp:sp>
+    <dsp:sp modelId="{CDED7CEB-F7A8-49E9-B07E-4179D621453A}">
+      <dsp:nvSpPr>
+        <dsp:cNvPr id="0" name=""/>
+        <dsp:cNvSpPr/>
+      </dsp:nvSpPr>
+      <dsp:spPr>
+        <a:xfrm>
+          <a:off x="0" y="1835791"/>
+          <a:ext cx="6263640" cy="916552"/>
+        </a:xfrm>
+        <a:prstGeom prst="rect">
+          <a:avLst/>
+        </a:prstGeom>
+        <a:noFill/>
+        <a:ln>
+          <a:noFill/>
+        </a:ln>
+        <a:effectLst/>
+      </dsp:spPr>
+      <dsp:style>
+        <a:lnRef idx="0">
+          <a:scrgbClr r="0" g="0" b="0"/>
+        </a:lnRef>
+        <a:fillRef idx="0">
+          <a:scrgbClr r="0" g="0" b="0"/>
+        </a:fillRef>
+        <a:effectRef idx="0">
+          <a:scrgbClr r="0" g="0" b="0"/>
+        </a:effectRef>
+        <a:fontRef idx="minor"/>
+      </dsp:style>
+      <dsp:txBody>
+        <a:bodyPr spcFirstLastPara="0" vert="horz" wrap="square" lIns="99060" tIns="99060" rIns="99060" bIns="99060" numCol="1" spcCol="1270" anchor="t" anchorCtr="0">
+          <a:noAutofit/>
+        </a:bodyPr>
+        <a:lstStyle/>
+        <a:p>
+          <a:pPr marL="0" lvl="0" indent="0" algn="l" defTabSz="1155700">
+            <a:lnSpc>
+              <a:spcPct val="90000"/>
+            </a:lnSpc>
+            <a:spcBef>
+              <a:spcPct val="0"/>
+            </a:spcBef>
+            <a:spcAft>
+              <a:spcPct val="35000"/>
+            </a:spcAft>
+            <a:buNone/>
+          </a:pPr>
+          <a:r>
+            <a:rPr lang="en-NL" sz="2600" b="0" i="0" kern="1200" baseline="0" dirty="0"/>
+            <a:t>I can explain why I want to explore AI further.</a:t>
+          </a:r>
+          <a:endParaRPr lang="en-US" sz="2600" kern="1200" dirty="0"/>
+        </a:p>
+      </dsp:txBody>
+      <dsp:txXfrm>
+        <a:off x="0" y="1835791"/>
+        <a:ext cx="6263640" cy="916552"/>
+      </dsp:txXfrm>
+    </dsp:sp>
+    <dsp:sp modelId="{0EF30970-362D-4B10-A5AF-5498496F3FC8}">
+      <dsp:nvSpPr>
+        <dsp:cNvPr id="0" name=""/>
+        <dsp:cNvSpPr/>
+      </dsp:nvSpPr>
+      <dsp:spPr>
+        <a:xfrm>
+          <a:off x="0" y="2752344"/>
+          <a:ext cx="6263640" cy="0"/>
+        </a:xfrm>
+        <a:prstGeom prst="line">
+          <a:avLst/>
+        </a:prstGeom>
+        <a:solidFill>
+          <a:schemeClr val="accent5">
+            <a:hueOff val="5025241"/>
+            <a:satOff val="538"/>
+            <a:lumOff val="-10354"/>
+            <a:alphaOff val="0"/>
+          </a:schemeClr>
+        </a:solidFill>
+        <a:ln w="19050" cap="flat" cmpd="sng" algn="ctr">
+          <a:solidFill>
+            <a:schemeClr val="accent5">
+              <a:hueOff val="5025241"/>
+              <a:satOff val="538"/>
+              <a:lumOff val="-10354"/>
+              <a:alphaOff val="0"/>
+            </a:schemeClr>
+          </a:solidFill>
+          <a:prstDash val="solid"/>
+          <a:miter lim="800000"/>
+        </a:ln>
+        <a:effectLst/>
+      </dsp:spPr>
+      <dsp:style>
+        <a:lnRef idx="2">
+          <a:scrgbClr r="0" g="0" b="0"/>
+        </a:lnRef>
+        <a:fillRef idx="1">
+          <a:scrgbClr r="0" g="0" b="0"/>
+        </a:fillRef>
+        <a:effectRef idx="0">
+          <a:scrgbClr r="0" g="0" b="0"/>
+        </a:effectRef>
+        <a:fontRef idx="minor">
+          <a:schemeClr val="lt1"/>
+        </a:fontRef>
+      </dsp:style>
+    </dsp:sp>
+    <dsp:sp modelId="{DF375642-AA51-4451-957F-3C9BD1758BBD}">
+      <dsp:nvSpPr>
+        <dsp:cNvPr id="0" name=""/>
+        <dsp:cNvSpPr/>
+      </dsp:nvSpPr>
+      <dsp:spPr>
+        <a:xfrm>
+          <a:off x="0" y="2752344"/>
+          <a:ext cx="6263640" cy="916552"/>
+        </a:xfrm>
+        <a:prstGeom prst="rect">
+          <a:avLst/>
+        </a:prstGeom>
+        <a:noFill/>
+        <a:ln>
+          <a:noFill/>
+        </a:ln>
+        <a:effectLst/>
+      </dsp:spPr>
+      <dsp:style>
+        <a:lnRef idx="0">
+          <a:scrgbClr r="0" g="0" b="0"/>
+        </a:lnRef>
+        <a:fillRef idx="0">
+          <a:scrgbClr r="0" g="0" b="0"/>
+        </a:fillRef>
+        <a:effectRef idx="0">
+          <a:scrgbClr r="0" g="0" b="0"/>
+        </a:effectRef>
+        <a:fontRef idx="minor"/>
+      </dsp:style>
+      <dsp:txBody>
+        <a:bodyPr spcFirstLastPara="0" vert="horz" wrap="square" lIns="99060" tIns="99060" rIns="99060" bIns="99060" numCol="1" spcCol="1270" anchor="t" anchorCtr="0">
+          <a:noAutofit/>
+        </a:bodyPr>
+        <a:lstStyle/>
+        <a:p>
+          <a:pPr marL="0" lvl="0" indent="0" algn="l" defTabSz="1155700">
+            <a:lnSpc>
+              <a:spcPct val="90000"/>
+            </a:lnSpc>
+            <a:spcBef>
+              <a:spcPct val="0"/>
+            </a:spcBef>
+            <a:spcAft>
+              <a:spcPct val="35000"/>
+            </a:spcAft>
+            <a:buNone/>
+          </a:pPr>
+          <a:r>
+            <a:rPr lang="en-NL" sz="2600" b="0" i="0" kern="1200" baseline="0" dirty="0"/>
+            <a:t>I have created a professional product that </a:t>
+          </a:r>
+          <a:r>
+            <a:rPr lang="en-US" sz="2600" b="0" i="0" kern="1200" baseline="0" dirty="0"/>
+            <a:t>an AI teacher validated</a:t>
+          </a:r>
+          <a:r>
+            <a:rPr lang="en-NL" sz="2600" b="0" i="0" kern="1200" baseline="0" dirty="0"/>
+            <a:t>.</a:t>
+          </a:r>
+          <a:endParaRPr lang="en-US" sz="2600" kern="1200" dirty="0"/>
+        </a:p>
+      </dsp:txBody>
+      <dsp:txXfrm>
+        <a:off x="0" y="2752344"/>
+        <a:ext cx="6263640" cy="916552"/>
+      </dsp:txXfrm>
+    </dsp:sp>
+    <dsp:sp modelId="{C40DD5C0-CEFF-4258-8C8E-8E4801ACFFE4}">
+      <dsp:nvSpPr>
+        <dsp:cNvPr id="0" name=""/>
+        <dsp:cNvSpPr/>
+      </dsp:nvSpPr>
+      <dsp:spPr>
+        <a:xfrm>
+          <a:off x="0" y="3668896"/>
+          <a:ext cx="6263640" cy="0"/>
+        </a:xfrm>
+        <a:prstGeom prst="line">
+          <a:avLst/>
+        </a:prstGeom>
+        <a:solidFill>
+          <a:schemeClr val="accent5">
+            <a:hueOff val="6700321"/>
+            <a:satOff val="718"/>
+            <a:lumOff val="-13805"/>
+            <a:alphaOff val="0"/>
+          </a:schemeClr>
+        </a:solidFill>
+        <a:ln w="19050" cap="flat" cmpd="sng" algn="ctr">
+          <a:solidFill>
+            <a:schemeClr val="accent5">
+              <a:hueOff val="6700321"/>
+              <a:satOff val="718"/>
+              <a:lumOff val="-13805"/>
+              <a:alphaOff val="0"/>
+            </a:schemeClr>
+          </a:solidFill>
+          <a:prstDash val="solid"/>
+          <a:miter lim="800000"/>
+        </a:ln>
+        <a:effectLst/>
+      </dsp:spPr>
+      <dsp:style>
+        <a:lnRef idx="2">
+          <a:scrgbClr r="0" g="0" b="0"/>
+        </a:lnRef>
+        <a:fillRef idx="1">
+          <a:scrgbClr r="0" g="0" b="0"/>
+        </a:fillRef>
+        <a:effectRef idx="0">
+          <a:scrgbClr r="0" g="0" b="0"/>
+        </a:effectRef>
+        <a:fontRef idx="minor">
+          <a:schemeClr val="lt1"/>
+        </a:fontRef>
+      </dsp:style>
+    </dsp:sp>
+    <dsp:sp modelId="{CDC8CEA4-CC94-4062-B832-A1EDF60DB258}">
+      <dsp:nvSpPr>
+        <dsp:cNvPr id="0" name=""/>
+        <dsp:cNvSpPr/>
+      </dsp:nvSpPr>
+      <dsp:spPr>
+        <a:xfrm>
+          <a:off x="0" y="3668896"/>
+          <a:ext cx="6263640" cy="916552"/>
+        </a:xfrm>
+        <a:prstGeom prst="rect">
+          <a:avLst/>
+        </a:prstGeom>
+        <a:noFill/>
+        <a:ln>
+          <a:noFill/>
+        </a:ln>
+        <a:effectLst/>
+      </dsp:spPr>
+      <dsp:style>
+        <a:lnRef idx="0">
+          <a:scrgbClr r="0" g="0" b="0"/>
+        </a:lnRef>
+        <a:fillRef idx="0">
+          <a:scrgbClr r="0" g="0" b="0"/>
+        </a:fillRef>
+        <a:effectRef idx="0">
+          <a:scrgbClr r="0" g="0" b="0"/>
+        </a:effectRef>
+        <a:fontRef idx="minor"/>
+      </dsp:style>
+      <dsp:txBody>
+        <a:bodyPr spcFirstLastPara="0" vert="horz" wrap="square" lIns="99060" tIns="99060" rIns="99060" bIns="99060" numCol="1" spcCol="1270" anchor="t" anchorCtr="0">
+          <a:noAutofit/>
+        </a:bodyPr>
+        <a:lstStyle/>
+        <a:p>
+          <a:pPr marL="0" lvl="0" indent="0" algn="l" defTabSz="1155700">
+            <a:lnSpc>
+              <a:spcPct val="90000"/>
+            </a:lnSpc>
+            <a:spcBef>
+              <a:spcPct val="0"/>
+            </a:spcBef>
+            <a:spcAft>
+              <a:spcPct val="35000"/>
+            </a:spcAft>
+            <a:buNone/>
+          </a:pPr>
+          <a:r>
+            <a:rPr lang="en-NL" sz="2600" b="0" i="0" kern="1200" baseline="0" dirty="0"/>
+            <a:t>I have researched the broader AI job market.</a:t>
+          </a:r>
+          <a:endParaRPr lang="en-US" sz="2600" kern="1200" dirty="0"/>
+        </a:p>
+      </dsp:txBody>
+      <dsp:txXfrm>
+        <a:off x="0" y="3668896"/>
+        <a:ext cx="6263640" cy="916552"/>
+      </dsp:txXfrm>
+    </dsp:sp>
+    <dsp:sp modelId="{CD4B0EE6-AC21-44E8-877C-3780B62AE8F9}">
+      <dsp:nvSpPr>
+        <dsp:cNvPr id="0" name=""/>
+        <dsp:cNvSpPr/>
+      </dsp:nvSpPr>
+      <dsp:spPr>
+        <a:xfrm>
+          <a:off x="0" y="4585448"/>
+          <a:ext cx="6263640" cy="0"/>
+        </a:xfrm>
+        <a:prstGeom prst="line">
+          <a:avLst/>
+        </a:prstGeom>
+        <a:solidFill>
+          <a:schemeClr val="accent5">
+            <a:hueOff val="8375402"/>
+            <a:satOff val="897"/>
+            <a:lumOff val="-17256"/>
+            <a:alphaOff val="0"/>
+          </a:schemeClr>
+        </a:solidFill>
+        <a:ln w="19050" cap="flat" cmpd="sng" algn="ctr">
+          <a:solidFill>
+            <a:schemeClr val="accent5">
+              <a:hueOff val="8375402"/>
+              <a:satOff val="897"/>
+              <a:lumOff val="-17256"/>
+              <a:alphaOff val="0"/>
+            </a:schemeClr>
+          </a:solidFill>
+          <a:prstDash val="solid"/>
+          <a:miter lim="800000"/>
+        </a:ln>
+        <a:effectLst/>
+      </dsp:spPr>
+      <dsp:style>
+        <a:lnRef idx="2">
+          <a:scrgbClr r="0" g="0" b="0"/>
+        </a:lnRef>
+        <a:fillRef idx="1">
+          <a:scrgbClr r="0" g="0" b="0"/>
+        </a:fillRef>
+        <a:effectRef idx="0">
+          <a:scrgbClr r="0" g="0" b="0"/>
+        </a:effectRef>
+        <a:fontRef idx="minor">
+          <a:schemeClr val="lt1"/>
+        </a:fontRef>
+      </dsp:style>
+    </dsp:sp>
+    <dsp:sp modelId="{12E709D0-8298-4FD7-8271-C663A9CDE5CA}">
+      <dsp:nvSpPr>
+        <dsp:cNvPr id="0" name=""/>
+        <dsp:cNvSpPr/>
+      </dsp:nvSpPr>
+      <dsp:spPr>
+        <a:xfrm>
+          <a:off x="0" y="4585448"/>
+          <a:ext cx="6263640" cy="916552"/>
+        </a:xfrm>
+        <a:prstGeom prst="rect">
+          <a:avLst/>
+        </a:prstGeom>
+        <a:noFill/>
+        <a:ln>
+          <a:noFill/>
+        </a:ln>
+        <a:effectLst/>
+      </dsp:spPr>
+      <dsp:style>
+        <a:lnRef idx="0">
+          <a:scrgbClr r="0" g="0" b="0"/>
+        </a:lnRef>
+        <a:fillRef idx="0">
+          <a:scrgbClr r="0" g="0" b="0"/>
+        </a:fillRef>
+        <a:effectRef idx="0">
+          <a:scrgbClr r="0" g="0" b="0"/>
+        </a:effectRef>
+        <a:fontRef idx="minor"/>
+      </dsp:style>
+      <dsp:txBody>
+        <a:bodyPr spcFirstLastPara="0" vert="horz" wrap="square" lIns="99060" tIns="99060" rIns="99060" bIns="99060" numCol="1" spcCol="1270" anchor="t" anchorCtr="0">
+          <a:noAutofit/>
+        </a:bodyPr>
+        <a:lstStyle/>
+        <a:p>
+          <a:pPr marL="0" lvl="0" indent="0" algn="l" defTabSz="1155700">
+            <a:lnSpc>
+              <a:spcPct val="90000"/>
+            </a:lnSpc>
+            <a:spcBef>
+              <a:spcPct val="0"/>
+            </a:spcBef>
+            <a:spcAft>
+              <a:spcPct val="35000"/>
+            </a:spcAft>
+            <a:buNone/>
+          </a:pPr>
+          <a:r>
+            <a:rPr lang="en-NL" sz="2600" b="0" i="0" kern="1200" baseline="0" dirty="0"/>
+            <a:t>I have looked into Fontys ICT AI semesters and possibilities.</a:t>
+          </a:r>
+          <a:endParaRPr lang="en-US" sz="2600" kern="1200" dirty="0"/>
+        </a:p>
+      </dsp:txBody>
+      <dsp:txXfrm>
+        <a:off x="0" y="4585448"/>
+        <a:ext cx="6263640" cy="916552"/>
+      </dsp:txXfrm>
+    </dsp:sp>
+  </dsp:spTree>
+</dsp:drawing>
+</file>
+
+<file path=ppt/diagrams/drawing4.xml><?xml version="1.0" encoding="utf-8"?>
 <dsp:drawing xmlns:dgm="http://schemas.openxmlformats.org/drawingml/2006/diagram" xmlns:dsp="http://schemas.microsoft.com/office/drawing/2008/diagram" xmlns:a="http://schemas.openxmlformats.org/drawingml/2006/main">
   <dsp:spTree>
     <dsp:nvGrpSpPr>
@@ -6434,6 +8303,472 @@
 </file>
 
 <file path=ppt/diagrams/layout3.xml><?xml version="1.0" encoding="utf-8"?>
+<dgm:layoutDef xmlns:dgm="http://schemas.openxmlformats.org/drawingml/2006/diagram" xmlns:a="http://schemas.openxmlformats.org/drawingml/2006/main" uniqueId="urn:microsoft.com/office/officeart/2008/layout/LinedList">
+  <dgm:title val=""/>
+  <dgm:desc val=""/>
+  <dgm:catLst>
+    <dgm:cat type="hierarchy" pri="8000"/>
+    <dgm:cat type="list" pri="2500"/>
+  </dgm:catLst>
+  <dgm:sampData>
+    <dgm:dataModel>
+      <dgm:ptLst>
+        <dgm:pt modelId="0" type="doc"/>
+        <dgm:pt modelId="1">
+          <dgm:prSet phldr="1"/>
+        </dgm:pt>
+        <dgm:pt modelId="11">
+          <dgm:prSet phldr="1"/>
+        </dgm:pt>
+        <dgm:pt modelId="12">
+          <dgm:prSet phldr="1"/>
+        </dgm:pt>
+        <dgm:pt modelId="13">
+          <dgm:prSet phldr="1"/>
+        </dgm:pt>
+      </dgm:ptLst>
+      <dgm:cxnLst>
+        <dgm:cxn modelId="2" srcId="0" destId="1" srcOrd="0" destOrd="0"/>
+        <dgm:cxn modelId="3" srcId="1" destId="11" srcOrd="0" destOrd="0"/>
+        <dgm:cxn modelId="4" srcId="1" destId="12" srcOrd="1" destOrd="0"/>
+        <dgm:cxn modelId="5" srcId="1" destId="13" srcOrd="2" destOrd="0"/>
+      </dgm:cxnLst>
+      <dgm:bg/>
+      <dgm:whole/>
+    </dgm:dataModel>
+  </dgm:sampData>
+  <dgm:styleData>
+    <dgm:dataModel>
+      <dgm:ptLst>
+        <dgm:pt modelId="0" type="doc"/>
+        <dgm:pt modelId="1">
+          <dgm:prSet phldr="1"/>
+        </dgm:pt>
+        <dgm:pt modelId="11">
+          <dgm:prSet phldr="1"/>
+        </dgm:pt>
+        <dgm:pt modelId="12">
+          <dgm:prSet phldr="1"/>
+        </dgm:pt>
+      </dgm:ptLst>
+      <dgm:cxnLst>
+        <dgm:cxn modelId="2" srcId="0" destId="1" srcOrd="0" destOrd="0"/>
+        <dgm:cxn modelId="3" srcId="1" destId="11" srcOrd="0" destOrd="0"/>
+        <dgm:cxn modelId="4" srcId="1" destId="12" srcOrd="1" destOrd="0"/>
+      </dgm:cxnLst>
+      <dgm:bg/>
+      <dgm:whole/>
+    </dgm:dataModel>
+  </dgm:styleData>
+  <dgm:clrData>
+    <dgm:dataModel>
+      <dgm:ptLst>
+        <dgm:pt modelId="0" type="doc"/>
+        <dgm:pt modelId="1">
+          <dgm:prSet phldr="1"/>
+        </dgm:pt>
+        <dgm:pt modelId="11">
+          <dgm:prSet phldr="1"/>
+        </dgm:pt>
+        <dgm:pt modelId="12">
+          <dgm:prSet phldr="1"/>
+        </dgm:pt>
+      </dgm:ptLst>
+      <dgm:cxnLst>
+        <dgm:cxn modelId="2" srcId="0" destId="1" srcOrd="0" destOrd="0"/>
+        <dgm:cxn modelId="3" srcId="1" destId="11" srcOrd="0" destOrd="0"/>
+        <dgm:cxn modelId="4" srcId="1" destId="12" srcOrd="1" destOrd="0"/>
+      </dgm:cxnLst>
+      <dgm:bg/>
+      <dgm:whole/>
+    </dgm:dataModel>
+  </dgm:clrData>
+  <dgm:layoutNode name="vert0">
+    <dgm:varLst>
+      <dgm:dir/>
+      <dgm:animOne val="branch"/>
+      <dgm:animLvl val="lvl"/>
+    </dgm:varLst>
+    <dgm:choose name="Name0">
+      <dgm:if name="Name1" func="var" arg="dir" op="equ" val="norm">
+        <dgm:alg type="lin">
+          <dgm:param type="linDir" val="fromT"/>
+          <dgm:param type="nodeHorzAlign" val="l"/>
+        </dgm:alg>
+      </dgm:if>
+      <dgm:else name="Name2">
+        <dgm:alg type="lin">
+          <dgm:param type="linDir" val="fromT"/>
+          <dgm:param type="nodeHorzAlign" val="r"/>
+        </dgm:alg>
+      </dgm:else>
+    </dgm:choose>
+    <dgm:shape xmlns:r="http://schemas.openxmlformats.org/officeDocument/2006/relationships" r:blip="">
+      <dgm:adjLst/>
+    </dgm:shape>
+    <dgm:presOf/>
+    <dgm:constrLst>
+      <dgm:constr type="w" for="ch" forName="horz1" refType="w"/>
+      <dgm:constr type="h" for="ch" forName="horz1" refType="h"/>
+      <dgm:constr type="h" for="des" forName="vert1" refType="h"/>
+      <dgm:constr type="h" for="des" forName="tx1" refType="h"/>
+      <dgm:constr type="h" for="des" forName="horz2" refType="h"/>
+      <dgm:constr type="h" for="des" forName="vert2" refType="h"/>
+      <dgm:constr type="h" for="des" forName="horz3" refType="h"/>
+      <dgm:constr type="h" for="des" forName="vert3" refType="h"/>
+      <dgm:constr type="h" for="des" forName="horz4" refType="h"/>
+      <dgm:constr type="h" for="des" ptType="node" refType="h"/>
+      <dgm:constr type="primFontSz" for="des" forName="tx1" op="equ" val="65"/>
+      <dgm:constr type="primFontSz" for="des" forName="tx2" op="equ" val="65"/>
+      <dgm:constr type="primFontSz" for="des" forName="tx3" op="equ" val="65"/>
+      <dgm:constr type="primFontSz" for="des" forName="tx4" op="equ" val="65"/>
+      <dgm:constr type="w" for="des" forName="thickLine" refType="w"/>
+      <dgm:constr type="h" for="des" forName="thickLine"/>
+      <dgm:constr type="h" for="des" forName="thinLine1"/>
+      <dgm:constr type="h" for="des" forName="thinLine2b"/>
+      <dgm:constr type="h" for="des" forName="thinLine3"/>
+      <dgm:constr type="h" for="des" forName="vertSpace2a" refType="h" fact="0.05"/>
+      <dgm:constr type="h" for="des" forName="vertSpace2b" refType="h" refFor="des" refForName="vertSpace2a"/>
+    </dgm:constrLst>
+    <dgm:forEach name="Name3" axis="ch" ptType="node">
+      <dgm:layoutNode name="thickLine" styleLbl="alignNode1">
+        <dgm:alg type="sp"/>
+        <dgm:shape xmlns:r="http://schemas.openxmlformats.org/officeDocument/2006/relationships" type="line" r:blip="">
+          <dgm:adjLst/>
+        </dgm:shape>
+        <dgm:presOf/>
+      </dgm:layoutNode>
+      <dgm:layoutNode name="horz1">
+        <dgm:choose name="Name4">
+          <dgm:if name="Name5" func="var" arg="dir" op="equ" val="norm">
+            <dgm:alg type="lin">
+              <dgm:param type="linDir" val="fromL"/>
+              <dgm:param type="nodeVertAlign" val="t"/>
+            </dgm:alg>
+          </dgm:if>
+          <dgm:else name="Name6">
+            <dgm:alg type="lin">
+              <dgm:param type="linDir" val="fromR"/>
+              <dgm:param type="nodeVertAlign" val="t"/>
+            </dgm:alg>
+          </dgm:else>
+        </dgm:choose>
+        <dgm:shape xmlns:r="http://schemas.openxmlformats.org/officeDocument/2006/relationships" r:blip="">
+          <dgm:adjLst/>
+        </dgm:shape>
+        <dgm:presOf/>
+        <dgm:choose name="Name7">
+          <dgm:if name="Name8" axis="root des" func="maxDepth" op="equ" val="1">
+            <dgm:constrLst>
+              <dgm:constr type="w" for="ch" forName="tx1" refType="w"/>
+            </dgm:constrLst>
+          </dgm:if>
+          <dgm:if name="Name9" axis="root des" func="maxDepth" op="equ" val="2">
+            <dgm:constrLst>
+              <dgm:constr type="w" for="ch" forName="tx1" refType="w" fact="0.2"/>
+              <dgm:constr type="w" for="des" forName="tx2" refType="w" fact="0.785"/>
+              <dgm:constr type="w" for="des" forName="horzSpace2" refType="w" fact="0.015"/>
+              <dgm:constr type="w" for="des" forName="thinLine2b" refType="w" fact="0.8"/>
+            </dgm:constrLst>
+          </dgm:if>
+          <dgm:if name="Name10" axis="root des" func="maxDepth" op="equ" val="3">
+            <dgm:constrLst>
+              <dgm:constr type="w" for="ch" forName="tx1" refType="w" fact="0.2"/>
+              <dgm:constr type="w" for="des" forName="tx2" refType="w" fact="0.385"/>
+              <dgm:constr type="w" for="des" forName="tx3" refType="w" fact="0.385"/>
+              <dgm:constr type="w" for="des" forName="horzSpace2" refType="w" fact="0.015"/>
+              <dgm:constr type="w" for="des" forName="horzSpace3" refType="w" fact="0.015"/>
+              <dgm:constr type="w" for="des" forName="thinLine2b" refType="w" fact="0.8"/>
+              <dgm:constr type="w" for="des" forName="thinLine3" refType="w" fact="0.385"/>
+            </dgm:constrLst>
+          </dgm:if>
+          <dgm:if name="Name11" axis="root des" func="maxDepth" op="gte" val="4">
+            <dgm:constrLst>
+              <dgm:constr type="w" for="ch" forName="tx1" refType="w" fact="0.2"/>
+              <dgm:constr type="w" for="des" forName="tx2" refType="w" fact="0.2516"/>
+              <dgm:constr type="w" for="des" forName="tx3" refType="w" fact="0.2516"/>
+              <dgm:constr type="w" for="des" forName="tx4" refType="w" fact="0.2516"/>
+              <dgm:constr type="w" for="des" forName="horzSpace2" refType="w" fact="0.015"/>
+              <dgm:constr type="w" for="des" forName="horzSpace3" refType="w" fact="0.015"/>
+              <dgm:constr type="w" for="des" forName="horzSpace4" refType="w" fact="0.015"/>
+              <dgm:constr type="w" for="des" forName="thinLine2b" refType="w" fact="0.8"/>
+              <dgm:constr type="w" for="des" forName="thinLine3" refType="w" fact="0.5332"/>
+            </dgm:constrLst>
+          </dgm:if>
+          <dgm:else name="Name12"/>
+        </dgm:choose>
+        <dgm:layoutNode name="tx1" styleLbl="revTx">
+          <dgm:alg type="tx">
+            <dgm:param type="parTxLTRAlign" val="l"/>
+            <dgm:param type="parTxRTLAlign" val="r"/>
+            <dgm:param type="txAnchorVert" val="t"/>
+          </dgm:alg>
+          <dgm:shape xmlns:r="http://schemas.openxmlformats.org/officeDocument/2006/relationships" type="rect" r:blip="">
+            <dgm:adjLst/>
+          </dgm:shape>
+          <dgm:presOf axis="self"/>
+          <dgm:constrLst>
+            <dgm:constr type="tMarg" refType="primFontSz" fact="0.3"/>
+            <dgm:constr type="bMarg" refType="primFontSz" fact="0.3"/>
+            <dgm:constr type="lMarg" refType="primFontSz" fact="0.3"/>
+            <dgm:constr type="rMarg" refType="primFontSz" fact="0.3"/>
+          </dgm:constrLst>
+          <dgm:ruleLst>
+            <dgm:rule type="primFontSz" val="5" fact="NaN" max="NaN"/>
+          </dgm:ruleLst>
+        </dgm:layoutNode>
+        <dgm:layoutNode name="vert1">
+          <dgm:choose name="Name13">
+            <dgm:if name="Name14" func="var" arg="dir" op="equ" val="norm">
+              <dgm:alg type="lin">
+                <dgm:param type="linDir" val="fromT"/>
+                <dgm:param type="nodeHorzAlign" val="l"/>
+              </dgm:alg>
+            </dgm:if>
+            <dgm:else name="Name15">
+              <dgm:alg type="lin">
+                <dgm:param type="linDir" val="fromT"/>
+                <dgm:param type="nodeHorzAlign" val="r"/>
+              </dgm:alg>
+            </dgm:else>
+          </dgm:choose>
+          <dgm:shape xmlns:r="http://schemas.openxmlformats.org/officeDocument/2006/relationships" r:blip="">
+            <dgm:adjLst/>
+          </dgm:shape>
+          <dgm:presOf/>
+          <dgm:forEach name="Name16" axis="ch" ptType="node">
+            <dgm:choose name="Name17">
+              <dgm:if name="Name18" axis="self" ptType="node" func="pos" op="equ" val="1">
+                <dgm:layoutNode name="vertSpace2a">
+                  <dgm:alg type="sp"/>
+                  <dgm:shape xmlns:r="http://schemas.openxmlformats.org/officeDocument/2006/relationships" r:blip="">
+                    <dgm:adjLst/>
+                  </dgm:shape>
+                  <dgm:presOf/>
+                </dgm:layoutNode>
+              </dgm:if>
+              <dgm:else name="Name19"/>
+            </dgm:choose>
+            <dgm:layoutNode name="horz2">
+              <dgm:choose name="Name20">
+                <dgm:if name="Name21" func="var" arg="dir" op="equ" val="norm">
+                  <dgm:alg type="lin">
+                    <dgm:param type="linDir" val="fromL"/>
+                    <dgm:param type="nodeVertAlign" val="t"/>
+                  </dgm:alg>
+                </dgm:if>
+                <dgm:else name="Name22">
+                  <dgm:alg type="lin">
+                    <dgm:param type="linDir" val="fromR"/>
+                    <dgm:param type="nodeVertAlign" val="t"/>
+                  </dgm:alg>
+                </dgm:else>
+              </dgm:choose>
+              <dgm:shape xmlns:r="http://schemas.openxmlformats.org/officeDocument/2006/relationships" r:blip="">
+                <dgm:adjLst/>
+              </dgm:shape>
+              <dgm:presOf/>
+              <dgm:layoutNode name="horzSpace2">
+                <dgm:alg type="sp"/>
+                <dgm:shape xmlns:r="http://schemas.openxmlformats.org/officeDocument/2006/relationships" r:blip="">
+                  <dgm:adjLst/>
+                </dgm:shape>
+                <dgm:presOf/>
+              </dgm:layoutNode>
+              <dgm:layoutNode name="tx2" styleLbl="revTx">
+                <dgm:alg type="tx">
+                  <dgm:param type="parTxLTRAlign" val="l"/>
+                  <dgm:param type="parTxRTLAlign" val="r"/>
+                  <dgm:param type="txAnchorVert" val="t"/>
+                </dgm:alg>
+                <dgm:shape xmlns:r="http://schemas.openxmlformats.org/officeDocument/2006/relationships" type="rect" r:blip="">
+                  <dgm:adjLst/>
+                </dgm:shape>
+                <dgm:presOf axis="self"/>
+                <dgm:constrLst>
+                  <dgm:constr type="tMarg" refType="primFontSz" fact="0.3"/>
+                  <dgm:constr type="bMarg" refType="primFontSz" fact="0.3"/>
+                  <dgm:constr type="lMarg" refType="primFontSz" fact="0.3"/>
+                  <dgm:constr type="rMarg" refType="primFontSz" fact="0.3"/>
+                </dgm:constrLst>
+                <dgm:ruleLst>
+                  <dgm:rule type="primFontSz" val="5" fact="NaN" max="NaN"/>
+                </dgm:ruleLst>
+              </dgm:layoutNode>
+              <dgm:layoutNode name="vert2">
+                <dgm:choose name="Name23">
+                  <dgm:if name="Name24" func="var" arg="dir" op="equ" val="norm">
+                    <dgm:alg type="lin">
+                      <dgm:param type="linDir" val="fromT"/>
+                      <dgm:param type="nodeHorzAlign" val="l"/>
+                    </dgm:alg>
+                  </dgm:if>
+                  <dgm:else name="Name25">
+                    <dgm:alg type="lin">
+                      <dgm:param type="linDir" val="fromT"/>
+                      <dgm:param type="nodeHorzAlign" val="r"/>
+                    </dgm:alg>
+                  </dgm:else>
+                </dgm:choose>
+                <dgm:shape xmlns:r="http://schemas.openxmlformats.org/officeDocument/2006/relationships" r:blip="">
+                  <dgm:adjLst/>
+                </dgm:shape>
+                <dgm:presOf/>
+                <dgm:forEach name="Name26" axis="ch" ptType="node">
+                  <dgm:layoutNode name="horz3">
+                    <dgm:choose name="Name27">
+                      <dgm:if name="Name28" func="var" arg="dir" op="equ" val="norm">
+                        <dgm:alg type="lin">
+                          <dgm:param type="linDir" val="fromL"/>
+                          <dgm:param type="nodeVertAlign" val="t"/>
+                        </dgm:alg>
+                      </dgm:if>
+                      <dgm:else name="Name29">
+                        <dgm:alg type="lin">
+                          <dgm:param type="linDir" val="fromR"/>
+                          <dgm:param type="nodeVertAlign" val="t"/>
+                        </dgm:alg>
+                      </dgm:else>
+                    </dgm:choose>
+                    <dgm:shape xmlns:r="http://schemas.openxmlformats.org/officeDocument/2006/relationships" r:blip="">
+                      <dgm:adjLst/>
+                    </dgm:shape>
+                    <dgm:presOf/>
+                    <dgm:layoutNode name="horzSpace3">
+                      <dgm:alg type="sp"/>
+                      <dgm:shape xmlns:r="http://schemas.openxmlformats.org/officeDocument/2006/relationships" r:blip="">
+                        <dgm:adjLst/>
+                      </dgm:shape>
+                      <dgm:presOf/>
+                    </dgm:layoutNode>
+                    <dgm:layoutNode name="tx3" styleLbl="revTx">
+                      <dgm:alg type="tx">
+                        <dgm:param type="parTxLTRAlign" val="l"/>
+                        <dgm:param type="parTxRTLAlign" val="r"/>
+                        <dgm:param type="txAnchorVert" val="t"/>
+                      </dgm:alg>
+                      <dgm:shape xmlns:r="http://schemas.openxmlformats.org/officeDocument/2006/relationships" type="rect" r:blip="">
+                        <dgm:adjLst/>
+                      </dgm:shape>
+                      <dgm:presOf axis="self"/>
+                      <dgm:constrLst>
+                        <dgm:constr type="tMarg" refType="primFontSz" fact="0.3"/>
+                        <dgm:constr type="bMarg" refType="primFontSz" fact="0.3"/>
+                        <dgm:constr type="lMarg" refType="primFontSz" fact="0.3"/>
+                        <dgm:constr type="rMarg" refType="primFontSz" fact="0.3"/>
+                      </dgm:constrLst>
+                      <dgm:ruleLst>
+                        <dgm:rule type="primFontSz" val="5" fact="NaN" max="NaN"/>
+                      </dgm:ruleLst>
+                    </dgm:layoutNode>
+                    <dgm:layoutNode name="vert3">
+                      <dgm:choose name="Name30">
+                        <dgm:if name="Name31" func="var" arg="dir" op="equ" val="norm">
+                          <dgm:alg type="lin">
+                            <dgm:param type="linDir" val="fromT"/>
+                            <dgm:param type="nodeHorzAlign" val="l"/>
+                          </dgm:alg>
+                        </dgm:if>
+                        <dgm:else name="Name32">
+                          <dgm:alg type="lin">
+                            <dgm:param type="linDir" val="fromT"/>
+                            <dgm:param type="nodeHorzAlign" val="r"/>
+                          </dgm:alg>
+                        </dgm:else>
+                      </dgm:choose>
+                      <dgm:shape xmlns:r="http://schemas.openxmlformats.org/officeDocument/2006/relationships" r:blip="">
+                        <dgm:adjLst/>
+                      </dgm:shape>
+                      <dgm:presOf/>
+                      <dgm:forEach name="Name33" axis="ch" ptType="node">
+                        <dgm:layoutNode name="horz4">
+                          <dgm:choose name="Name34">
+                            <dgm:if name="Name35" func="var" arg="dir" op="equ" val="norm">
+                              <dgm:alg type="lin">
+                                <dgm:param type="linDir" val="fromL"/>
+                                <dgm:param type="nodeVertAlign" val="t"/>
+                              </dgm:alg>
+                            </dgm:if>
+                            <dgm:else name="Name36">
+                              <dgm:alg type="lin">
+                                <dgm:param type="linDir" val="fromR"/>
+                                <dgm:param type="nodeVertAlign" val="t"/>
+                              </dgm:alg>
+                            </dgm:else>
+                          </dgm:choose>
+                          <dgm:shape xmlns:r="http://schemas.openxmlformats.org/officeDocument/2006/relationships" r:blip="">
+                            <dgm:adjLst/>
+                          </dgm:shape>
+                          <dgm:presOf/>
+                          <dgm:layoutNode name="horzSpace4">
+                            <dgm:alg type="sp"/>
+                            <dgm:shape xmlns:r="http://schemas.openxmlformats.org/officeDocument/2006/relationships" r:blip="">
+                              <dgm:adjLst/>
+                            </dgm:shape>
+                            <dgm:presOf/>
+                          </dgm:layoutNode>
+                          <dgm:layoutNode name="tx4" styleLbl="revTx">
+                            <dgm:varLst>
+                              <dgm:bulletEnabled val="1"/>
+                            </dgm:varLst>
+                            <dgm:alg type="tx">
+                              <dgm:param type="parTxLTRAlign" val="l"/>
+                              <dgm:param type="parTxRTLAlign" val="r"/>
+                              <dgm:param type="txAnchorVert" val="t"/>
+                            </dgm:alg>
+                            <dgm:shape xmlns:r="http://schemas.openxmlformats.org/officeDocument/2006/relationships" type="rect" r:blip="">
+                              <dgm:adjLst/>
+                            </dgm:shape>
+                            <dgm:presOf axis="desOrSelf" ptType="node"/>
+                            <dgm:constrLst>
+                              <dgm:constr type="tMarg" refType="primFontSz" fact="0.3"/>
+                              <dgm:constr type="bMarg" refType="primFontSz" fact="0.3"/>
+                              <dgm:constr type="lMarg" refType="primFontSz" fact="0.3"/>
+                              <dgm:constr type="rMarg" refType="primFontSz" fact="0.3"/>
+                            </dgm:constrLst>
+                            <dgm:ruleLst>
+                              <dgm:rule type="primFontSz" val="5" fact="NaN" max="NaN"/>
+                            </dgm:ruleLst>
+                          </dgm:layoutNode>
+                        </dgm:layoutNode>
+                      </dgm:forEach>
+                    </dgm:layoutNode>
+                  </dgm:layoutNode>
+                  <dgm:forEach name="Name37" axis="followSib" ptType="sibTrans" cnt="1">
+                    <dgm:layoutNode name="thinLine3" styleLbl="callout">
+                      <dgm:alg type="sp"/>
+                      <dgm:shape xmlns:r="http://schemas.openxmlformats.org/officeDocument/2006/relationships" type="line" r:blip="">
+                        <dgm:adjLst/>
+                      </dgm:shape>
+                      <dgm:presOf/>
+                    </dgm:layoutNode>
+                  </dgm:forEach>
+                </dgm:forEach>
+              </dgm:layoutNode>
+            </dgm:layoutNode>
+            <dgm:layoutNode name="thinLine2b" styleLbl="callout">
+              <dgm:alg type="sp"/>
+              <dgm:shape xmlns:r="http://schemas.openxmlformats.org/officeDocument/2006/relationships" type="line" r:blip="">
+                <dgm:adjLst/>
+              </dgm:shape>
+              <dgm:presOf/>
+            </dgm:layoutNode>
+            <dgm:layoutNode name="vertSpace2b">
+              <dgm:alg type="sp"/>
+              <dgm:shape xmlns:r="http://schemas.openxmlformats.org/officeDocument/2006/relationships" r:blip="">
+                <dgm:adjLst/>
+              </dgm:shape>
+              <dgm:presOf/>
+            </dgm:layoutNode>
+          </dgm:forEach>
+        </dgm:layoutNode>
+      </dgm:layoutNode>
+    </dgm:forEach>
+  </dgm:layoutNode>
+</dgm:layoutDef>
+</file>
+
+<file path=ppt/diagrams/layout4.xml><?xml version="1.0" encoding="utf-8"?>
 <dgm:layoutDef xmlns:dgm="http://schemas.openxmlformats.org/drawingml/2006/diagram" xmlns:a="http://schemas.openxmlformats.org/drawingml/2006/main" uniqueId="urn:microsoft.com/office/officeart/2005/8/layout/default">
   <dgm:title val=""/>
   <dgm:desc val=""/>
@@ -6581,7 +8916,7 @@
 </file>
 
 <file path=ppt/diagrams/quickStyle1.xml><?xml version="1.0" encoding="utf-8"?>
-<dgm:styleDef xmlns:dgm="http://schemas.openxmlformats.org/drawingml/2006/diagram" xmlns:a="http://schemas.openxmlformats.org/drawingml/2006/main" uniqueId="urn:microsoft.com/office/officeart/2005/8/quickstyle/simple1">
+<dgm:styleDef xmlns:dgm="http://schemas.openxmlformats.org/drawingml/2006/diagram" xmlns:a="http://schemas.openxmlformats.org/drawingml/2006/main" uniqueId="urn:microsoft.com/office/officeart/2005/8/quickstyle/simple1#3">
   <dgm:title val=""/>
   <dgm:desc val=""/>
   <dgm:catLst>
@@ -7615,7 +9950,7 @@
 </file>
 
 <file path=ppt/diagrams/quickStyle2.xml><?xml version="1.0" encoding="utf-8"?>
-<dgm:styleDef xmlns:dgm="http://schemas.openxmlformats.org/drawingml/2006/diagram" xmlns:a="http://schemas.openxmlformats.org/drawingml/2006/main" uniqueId="urn:microsoft.com/office/officeart/2005/8/quickstyle/simple1">
+<dgm:styleDef xmlns:dgm="http://schemas.openxmlformats.org/drawingml/2006/diagram" xmlns:a="http://schemas.openxmlformats.org/drawingml/2006/main" uniqueId="urn:microsoft.com/office/officeart/2005/8/quickstyle/simple1#4">
   <dgm:title val=""/>
   <dgm:desc val=""/>
   <dgm:catLst>
@@ -8649,7 +10984,1041 @@
 </file>
 
 <file path=ppt/diagrams/quickStyle3.xml><?xml version="1.0" encoding="utf-8"?>
-<dgm:styleDef xmlns:dgm="http://schemas.openxmlformats.org/drawingml/2006/diagram" xmlns:a="http://schemas.openxmlformats.org/drawingml/2006/main" uniqueId="urn:microsoft.com/office/officeart/2005/8/quickstyle/3d2">
+<dgm:styleDef xmlns:dgm="http://schemas.openxmlformats.org/drawingml/2006/diagram" xmlns:a="http://schemas.openxmlformats.org/drawingml/2006/main" uniqueId="urn:microsoft.com/office/officeart/2005/8/quickstyle/simple1#5">
+  <dgm:title val=""/>
+  <dgm:desc val=""/>
+  <dgm:catLst>
+    <dgm:cat type="simple" pri="10100"/>
+  </dgm:catLst>
+  <dgm:scene3d>
+    <a:camera prst="orthographicFront"/>
+    <a:lightRig rig="threePt" dir="t"/>
+  </dgm:scene3d>
+  <dgm:styleLbl name="node0">
+    <dgm:scene3d>
+      <a:camera prst="orthographicFront"/>
+      <a:lightRig rig="threePt" dir="t"/>
+    </dgm:scene3d>
+    <dgm:sp3d/>
+    <dgm:txPr/>
+    <dgm:style>
+      <a:lnRef idx="2">
+        <a:scrgbClr r="0" g="0" b="0"/>
+      </a:lnRef>
+      <a:fillRef idx="1">
+        <a:scrgbClr r="0" g="0" b="0"/>
+      </a:fillRef>
+      <a:effectRef idx="0">
+        <a:scrgbClr r="0" g="0" b="0"/>
+      </a:effectRef>
+      <a:fontRef idx="minor">
+        <a:schemeClr val="lt1"/>
+      </a:fontRef>
+    </dgm:style>
+  </dgm:styleLbl>
+  <dgm:styleLbl name="lnNode1">
+    <dgm:scene3d>
+      <a:camera prst="orthographicFront"/>
+      <a:lightRig rig="threePt" dir="t"/>
+    </dgm:scene3d>
+    <dgm:sp3d/>
+    <dgm:txPr/>
+    <dgm:style>
+      <a:lnRef idx="2">
+        <a:scrgbClr r="0" g="0" b="0"/>
+      </a:lnRef>
+      <a:fillRef idx="1">
+        <a:scrgbClr r="0" g="0" b="0"/>
+      </a:fillRef>
+      <a:effectRef idx="0">
+        <a:scrgbClr r="0" g="0" b="0"/>
+      </a:effectRef>
+      <a:fontRef idx="minor">
+        <a:schemeClr val="lt1"/>
+      </a:fontRef>
+    </dgm:style>
+  </dgm:styleLbl>
+  <dgm:styleLbl name="vennNode1">
+    <dgm:scene3d>
+      <a:camera prst="orthographicFront"/>
+      <a:lightRig rig="threePt" dir="t"/>
+    </dgm:scene3d>
+    <dgm:sp3d/>
+    <dgm:txPr/>
+    <dgm:style>
+      <a:lnRef idx="2">
+        <a:scrgbClr r="0" g="0" b="0"/>
+      </a:lnRef>
+      <a:fillRef idx="1">
+        <a:scrgbClr r="0" g="0" b="0"/>
+      </a:fillRef>
+      <a:effectRef idx="0">
+        <a:scrgbClr r="0" g="0" b="0"/>
+      </a:effectRef>
+      <a:fontRef idx="minor">
+        <a:schemeClr val="tx1"/>
+      </a:fontRef>
+    </dgm:style>
+  </dgm:styleLbl>
+  <dgm:styleLbl name="alignNode1">
+    <dgm:scene3d>
+      <a:camera prst="orthographicFront"/>
+      <a:lightRig rig="threePt" dir="t"/>
+    </dgm:scene3d>
+    <dgm:sp3d/>
+    <dgm:txPr/>
+    <dgm:style>
+      <a:lnRef idx="2">
+        <a:scrgbClr r="0" g="0" b="0"/>
+      </a:lnRef>
+      <a:fillRef idx="1">
+        <a:scrgbClr r="0" g="0" b="0"/>
+      </a:fillRef>
+      <a:effectRef idx="0">
+        <a:scrgbClr r="0" g="0" b="0"/>
+      </a:effectRef>
+      <a:fontRef idx="minor">
+        <a:schemeClr val="lt1"/>
+      </a:fontRef>
+    </dgm:style>
+  </dgm:styleLbl>
+  <dgm:styleLbl name="node1">
+    <dgm:scene3d>
+      <a:camera prst="orthographicFront"/>
+      <a:lightRig rig="threePt" dir="t"/>
+    </dgm:scene3d>
+    <dgm:sp3d/>
+    <dgm:txPr/>
+    <dgm:style>
+      <a:lnRef idx="2">
+        <a:scrgbClr r="0" g="0" b="0"/>
+      </a:lnRef>
+      <a:fillRef idx="1">
+        <a:scrgbClr r="0" g="0" b="0"/>
+      </a:fillRef>
+      <a:effectRef idx="0">
+        <a:scrgbClr r="0" g="0" b="0"/>
+      </a:effectRef>
+      <a:fontRef idx="minor">
+        <a:schemeClr val="lt1"/>
+      </a:fontRef>
+    </dgm:style>
+  </dgm:styleLbl>
+  <dgm:styleLbl name="node2">
+    <dgm:scene3d>
+      <a:camera prst="orthographicFront"/>
+      <a:lightRig rig="threePt" dir="t"/>
+    </dgm:scene3d>
+    <dgm:sp3d/>
+    <dgm:txPr/>
+    <dgm:style>
+      <a:lnRef idx="2">
+        <a:scrgbClr r="0" g="0" b="0"/>
+      </a:lnRef>
+      <a:fillRef idx="1">
+        <a:scrgbClr r="0" g="0" b="0"/>
+      </a:fillRef>
+      <a:effectRef idx="0">
+        <a:scrgbClr r="0" g="0" b="0"/>
+      </a:effectRef>
+      <a:fontRef idx="minor">
+        <a:schemeClr val="lt1"/>
+      </a:fontRef>
+    </dgm:style>
+  </dgm:styleLbl>
+  <dgm:styleLbl name="node3">
+    <dgm:scene3d>
+      <a:camera prst="orthographicFront"/>
+      <a:lightRig rig="threePt" dir="t"/>
+    </dgm:scene3d>
+    <dgm:sp3d/>
+    <dgm:txPr/>
+    <dgm:style>
+      <a:lnRef idx="2">
+        <a:scrgbClr r="0" g="0" b="0"/>
+      </a:lnRef>
+      <a:fillRef idx="1">
+        <a:scrgbClr r="0" g="0" b="0"/>
+      </a:fillRef>
+      <a:effectRef idx="0">
+        <a:scrgbClr r="0" g="0" b="0"/>
+      </a:effectRef>
+      <a:fontRef idx="minor">
+        <a:schemeClr val="lt1"/>
+      </a:fontRef>
+    </dgm:style>
+  </dgm:styleLbl>
+  <dgm:styleLbl name="node4">
+    <dgm:scene3d>
+      <a:camera prst="orthographicFront"/>
+      <a:lightRig rig="threePt" dir="t"/>
+    </dgm:scene3d>
+    <dgm:sp3d/>
+    <dgm:txPr/>
+    <dgm:style>
+      <a:lnRef idx="2">
+        <a:scrgbClr r="0" g="0" b="0"/>
+      </a:lnRef>
+      <a:fillRef idx="1">
+        <a:scrgbClr r="0" g="0" b="0"/>
+      </a:fillRef>
+      <a:effectRef idx="0">
+        <a:scrgbClr r="0" g="0" b="0"/>
+      </a:effectRef>
+      <a:fontRef idx="minor">
+        <a:schemeClr val="lt1"/>
+      </a:fontRef>
+    </dgm:style>
+  </dgm:styleLbl>
+  <dgm:styleLbl name="fgImgPlace1">
+    <dgm:scene3d>
+      <a:camera prst="orthographicFront"/>
+      <a:lightRig rig="threePt" dir="t"/>
+    </dgm:scene3d>
+    <dgm:sp3d/>
+    <dgm:txPr/>
+    <dgm:style>
+      <a:lnRef idx="2">
+        <a:scrgbClr r="0" g="0" b="0"/>
+      </a:lnRef>
+      <a:fillRef idx="1">
+        <a:scrgbClr r="0" g="0" b="0"/>
+      </a:fillRef>
+      <a:effectRef idx="0">
+        <a:scrgbClr r="0" g="0" b="0"/>
+      </a:effectRef>
+      <a:fontRef idx="minor"/>
+    </dgm:style>
+  </dgm:styleLbl>
+  <dgm:styleLbl name="alignImgPlace1">
+    <dgm:scene3d>
+      <a:camera prst="orthographicFront"/>
+      <a:lightRig rig="threePt" dir="t"/>
+    </dgm:scene3d>
+    <dgm:sp3d/>
+    <dgm:txPr/>
+    <dgm:style>
+      <a:lnRef idx="2">
+        <a:scrgbClr r="0" g="0" b="0"/>
+      </a:lnRef>
+      <a:fillRef idx="1">
+        <a:scrgbClr r="0" g="0" b="0"/>
+      </a:fillRef>
+      <a:effectRef idx="0">
+        <a:scrgbClr r="0" g="0" b="0"/>
+      </a:effectRef>
+      <a:fontRef idx="minor"/>
+    </dgm:style>
+  </dgm:styleLbl>
+  <dgm:styleLbl name="bgImgPlace1">
+    <dgm:scene3d>
+      <a:camera prst="orthographicFront"/>
+      <a:lightRig rig="threePt" dir="t"/>
+    </dgm:scene3d>
+    <dgm:sp3d/>
+    <dgm:txPr/>
+    <dgm:style>
+      <a:lnRef idx="2">
+        <a:scrgbClr r="0" g="0" b="0"/>
+      </a:lnRef>
+      <a:fillRef idx="1">
+        <a:scrgbClr r="0" g="0" b="0"/>
+      </a:fillRef>
+      <a:effectRef idx="0">
+        <a:scrgbClr r="0" g="0" b="0"/>
+      </a:effectRef>
+      <a:fontRef idx="minor"/>
+    </dgm:style>
+  </dgm:styleLbl>
+  <dgm:styleLbl name="sibTrans2D1">
+    <dgm:scene3d>
+      <a:camera prst="orthographicFront"/>
+      <a:lightRig rig="threePt" dir="t"/>
+    </dgm:scene3d>
+    <dgm:sp3d/>
+    <dgm:txPr/>
+    <dgm:style>
+      <a:lnRef idx="0">
+        <a:scrgbClr r="0" g="0" b="0"/>
+      </a:lnRef>
+      <a:fillRef idx="1">
+        <a:scrgbClr r="0" g="0" b="0"/>
+      </a:fillRef>
+      <a:effectRef idx="0">
+        <a:scrgbClr r="0" g="0" b="0"/>
+      </a:effectRef>
+      <a:fontRef idx="minor">
+        <a:schemeClr val="lt1"/>
+      </a:fontRef>
+    </dgm:style>
+  </dgm:styleLbl>
+  <dgm:styleLbl name="fgSibTrans2D1">
+    <dgm:scene3d>
+      <a:camera prst="orthographicFront"/>
+      <a:lightRig rig="threePt" dir="t"/>
+    </dgm:scene3d>
+    <dgm:sp3d/>
+    <dgm:txPr/>
+    <dgm:style>
+      <a:lnRef idx="0">
+        <a:scrgbClr r="0" g="0" b="0"/>
+      </a:lnRef>
+      <a:fillRef idx="1">
+        <a:scrgbClr r="0" g="0" b="0"/>
+      </a:fillRef>
+      <a:effectRef idx="0">
+        <a:scrgbClr r="0" g="0" b="0"/>
+      </a:effectRef>
+      <a:fontRef idx="minor">
+        <a:schemeClr val="lt1"/>
+      </a:fontRef>
+    </dgm:style>
+  </dgm:styleLbl>
+  <dgm:styleLbl name="bgSibTrans2D1">
+    <dgm:scene3d>
+      <a:camera prst="orthographicFront"/>
+      <a:lightRig rig="threePt" dir="t"/>
+    </dgm:scene3d>
+    <dgm:sp3d/>
+    <dgm:txPr/>
+    <dgm:style>
+      <a:lnRef idx="0">
+        <a:scrgbClr r="0" g="0" b="0"/>
+      </a:lnRef>
+      <a:fillRef idx="1">
+        <a:scrgbClr r="0" g="0" b="0"/>
+      </a:fillRef>
+      <a:effectRef idx="0">
+        <a:scrgbClr r="0" g="0" b="0"/>
+      </a:effectRef>
+      <a:fontRef idx="minor">
+        <a:schemeClr val="lt1"/>
+      </a:fontRef>
+    </dgm:style>
+  </dgm:styleLbl>
+  <dgm:styleLbl name="sibTrans1D1">
+    <dgm:scene3d>
+      <a:camera prst="orthographicFront"/>
+      <a:lightRig rig="threePt" dir="t"/>
+    </dgm:scene3d>
+    <dgm:sp3d/>
+    <dgm:txPr/>
+    <dgm:style>
+      <a:lnRef idx="1">
+        <a:scrgbClr r="0" g="0" b="0"/>
+      </a:lnRef>
+      <a:fillRef idx="0">
+        <a:scrgbClr r="0" g="0" b="0"/>
+      </a:fillRef>
+      <a:effectRef idx="0">
+        <a:scrgbClr r="0" g="0" b="0"/>
+      </a:effectRef>
+      <a:fontRef idx="minor"/>
+    </dgm:style>
+  </dgm:styleLbl>
+  <dgm:styleLbl name="callout">
+    <dgm:scene3d>
+      <a:camera prst="orthographicFront"/>
+      <a:lightRig rig="threePt" dir="t"/>
+    </dgm:scene3d>
+    <dgm:sp3d/>
+    <dgm:txPr/>
+    <dgm:style>
+      <a:lnRef idx="2">
+        <a:scrgbClr r="0" g="0" b="0"/>
+      </a:lnRef>
+      <a:fillRef idx="1">
+        <a:scrgbClr r="0" g="0" b="0"/>
+      </a:fillRef>
+      <a:effectRef idx="0">
+        <a:scrgbClr r="0" g="0" b="0"/>
+      </a:effectRef>
+      <a:fontRef idx="minor"/>
+    </dgm:style>
+  </dgm:styleLbl>
+  <dgm:styleLbl name="asst0">
+    <dgm:scene3d>
+      <a:camera prst="orthographicFront"/>
+      <a:lightRig rig="threePt" dir="t"/>
+    </dgm:scene3d>
+    <dgm:sp3d/>
+    <dgm:txPr/>
+    <dgm:style>
+      <a:lnRef idx="2">
+        <a:scrgbClr r="0" g="0" b="0"/>
+      </a:lnRef>
+      <a:fillRef idx="1">
+        <a:scrgbClr r="0" g="0" b="0"/>
+      </a:fillRef>
+      <a:effectRef idx="0">
+        <a:scrgbClr r="0" g="0" b="0"/>
+      </a:effectRef>
+      <a:fontRef idx="minor">
+        <a:schemeClr val="lt1"/>
+      </a:fontRef>
+    </dgm:style>
+  </dgm:styleLbl>
+  <dgm:styleLbl name="asst1">
+    <dgm:scene3d>
+      <a:camera prst="orthographicFront"/>
+      <a:lightRig rig="threePt" dir="t"/>
+    </dgm:scene3d>
+    <dgm:sp3d/>
+    <dgm:txPr/>
+    <dgm:style>
+      <a:lnRef idx="2">
+        <a:scrgbClr r="0" g="0" b="0"/>
+      </a:lnRef>
+      <a:fillRef idx="1">
+        <a:scrgbClr r="0" g="0" b="0"/>
+      </a:fillRef>
+      <a:effectRef idx="0">
+        <a:scrgbClr r="0" g="0" b="0"/>
+      </a:effectRef>
+      <a:fontRef idx="minor">
+        <a:schemeClr val="lt1"/>
+      </a:fontRef>
+    </dgm:style>
+  </dgm:styleLbl>
+  <dgm:styleLbl name="asst2">
+    <dgm:scene3d>
+      <a:camera prst="orthographicFront"/>
+      <a:lightRig rig="threePt" dir="t"/>
+    </dgm:scene3d>
+    <dgm:sp3d/>
+    <dgm:txPr/>
+    <dgm:style>
+      <a:lnRef idx="2">
+        <a:scrgbClr r="0" g="0" b="0"/>
+      </a:lnRef>
+      <a:fillRef idx="1">
+        <a:scrgbClr r="0" g="0" b="0"/>
+      </a:fillRef>
+      <a:effectRef idx="0">
+        <a:scrgbClr r="0" g="0" b="0"/>
+      </a:effectRef>
+      <a:fontRef idx="minor">
+        <a:schemeClr val="lt1"/>
+      </a:fontRef>
+    </dgm:style>
+  </dgm:styleLbl>
+  <dgm:styleLbl name="asst3">
+    <dgm:scene3d>
+      <a:camera prst="orthographicFront"/>
+      <a:lightRig rig="threePt" dir="t"/>
+    </dgm:scene3d>
+    <dgm:sp3d/>
+    <dgm:txPr/>
+    <dgm:style>
+      <a:lnRef idx="2">
+        <a:scrgbClr r="0" g="0" b="0"/>
+      </a:lnRef>
+      <a:fillRef idx="1">
+        <a:scrgbClr r="0" g="0" b="0"/>
+      </a:fillRef>
+      <a:effectRef idx="0">
+        <a:scrgbClr r="0" g="0" b="0"/>
+      </a:effectRef>
+      <a:fontRef idx="minor">
+        <a:schemeClr val="lt1"/>
+      </a:fontRef>
+    </dgm:style>
+  </dgm:styleLbl>
+  <dgm:styleLbl name="asst4">
+    <dgm:scene3d>
+      <a:camera prst="orthographicFront"/>
+      <a:lightRig rig="threePt" dir="t"/>
+    </dgm:scene3d>
+    <dgm:sp3d/>
+    <dgm:txPr/>
+    <dgm:style>
+      <a:lnRef idx="2">
+        <a:scrgbClr r="0" g="0" b="0"/>
+      </a:lnRef>
+      <a:fillRef idx="1">
+        <a:scrgbClr r="0" g="0" b="0"/>
+      </a:fillRef>
+      <a:effectRef idx="0">
+        <a:scrgbClr r="0" g="0" b="0"/>
+      </a:effectRef>
+      <a:fontRef idx="minor">
+        <a:schemeClr val="lt1"/>
+      </a:fontRef>
+    </dgm:style>
+  </dgm:styleLbl>
+  <dgm:styleLbl name="parChTrans2D1">
+    <dgm:scene3d>
+      <a:camera prst="orthographicFront"/>
+      <a:lightRig rig="threePt" dir="t"/>
+    </dgm:scene3d>
+    <dgm:sp3d/>
+    <dgm:txPr/>
+    <dgm:style>
+      <a:lnRef idx="2">
+        <a:scrgbClr r="0" g="0" b="0"/>
+      </a:lnRef>
+      <a:fillRef idx="1">
+        <a:scrgbClr r="0" g="0" b="0"/>
+      </a:fillRef>
+      <a:effectRef idx="0">
+        <a:scrgbClr r="0" g="0" b="0"/>
+      </a:effectRef>
+      <a:fontRef idx="minor">
+        <a:schemeClr val="lt1"/>
+      </a:fontRef>
+    </dgm:style>
+  </dgm:styleLbl>
+  <dgm:styleLbl name="parChTrans2D2">
+    <dgm:scene3d>
+      <a:camera prst="orthographicFront"/>
+      <a:lightRig rig="threePt" dir="t"/>
+    </dgm:scene3d>
+    <dgm:sp3d/>
+    <dgm:txPr/>
+    <dgm:style>
+      <a:lnRef idx="2">
+        <a:scrgbClr r="0" g="0" b="0"/>
+      </a:lnRef>
+      <a:fillRef idx="1">
+        <a:scrgbClr r="0" g="0" b="0"/>
+      </a:fillRef>
+      <a:effectRef idx="0">
+        <a:scrgbClr r="0" g="0" b="0"/>
+      </a:effectRef>
+      <a:fontRef idx="minor">
+        <a:schemeClr val="lt1"/>
+      </a:fontRef>
+    </dgm:style>
+  </dgm:styleLbl>
+  <dgm:styleLbl name="parChTrans2D3">
+    <dgm:scene3d>
+      <a:camera prst="orthographicFront"/>
+      <a:lightRig rig="threePt" dir="t"/>
+    </dgm:scene3d>
+    <dgm:sp3d/>
+    <dgm:txPr/>
+    <dgm:style>
+      <a:lnRef idx="2">
+        <a:scrgbClr r="0" g="0" b="0"/>
+      </a:lnRef>
+      <a:fillRef idx="1">
+        <a:scrgbClr r="0" g="0" b="0"/>
+      </a:fillRef>
+      <a:effectRef idx="0">
+        <a:scrgbClr r="0" g="0" b="0"/>
+      </a:effectRef>
+      <a:fontRef idx="minor">
+        <a:schemeClr val="lt1"/>
+      </a:fontRef>
+    </dgm:style>
+  </dgm:styleLbl>
+  <dgm:styleLbl name="parChTrans2D4">
+    <dgm:scene3d>
+      <a:camera prst="orthographicFront"/>
+      <a:lightRig rig="threePt" dir="t"/>
+    </dgm:scene3d>
+    <dgm:sp3d/>
+    <dgm:txPr/>
+    <dgm:style>
+      <a:lnRef idx="2">
+        <a:scrgbClr r="0" g="0" b="0"/>
+      </a:lnRef>
+      <a:fillRef idx="1">
+        <a:scrgbClr r="0" g="0" b="0"/>
+      </a:fillRef>
+      <a:effectRef idx="0">
+        <a:scrgbClr r="0" g="0" b="0"/>
+      </a:effectRef>
+      <a:fontRef idx="minor">
+        <a:schemeClr val="lt1"/>
+      </a:fontRef>
+    </dgm:style>
+  </dgm:styleLbl>
+  <dgm:styleLbl name="parChTrans1D1">
+    <dgm:scene3d>
+      <a:camera prst="orthographicFront"/>
+      <a:lightRig rig="threePt" dir="t"/>
+    </dgm:scene3d>
+    <dgm:sp3d/>
+    <dgm:txPr/>
+    <dgm:style>
+      <a:lnRef idx="2">
+        <a:scrgbClr r="0" g="0" b="0"/>
+      </a:lnRef>
+      <a:fillRef idx="0">
+        <a:scrgbClr r="0" g="0" b="0"/>
+      </a:fillRef>
+      <a:effectRef idx="0">
+        <a:scrgbClr r="0" g="0" b="0"/>
+      </a:effectRef>
+      <a:fontRef idx="minor"/>
+    </dgm:style>
+  </dgm:styleLbl>
+  <dgm:styleLbl name="parChTrans1D2">
+    <dgm:scene3d>
+      <a:camera prst="orthographicFront"/>
+      <a:lightRig rig="threePt" dir="t"/>
+    </dgm:scene3d>
+    <dgm:sp3d/>
+    <dgm:txPr/>
+    <dgm:style>
+      <a:lnRef idx="2">
+        <a:scrgbClr r="0" g="0" b="0"/>
+      </a:lnRef>
+      <a:fillRef idx="0">
+        <a:scrgbClr r="0" g="0" b="0"/>
+      </a:fillRef>
+      <a:effectRef idx="0">
+        <a:scrgbClr r="0" g="0" b="0"/>
+      </a:effectRef>
+      <a:fontRef idx="minor"/>
+    </dgm:style>
+  </dgm:styleLbl>
+  <dgm:styleLbl name="parChTrans1D3">
+    <dgm:scene3d>
+      <a:camera prst="orthographicFront"/>
+      <a:lightRig rig="threePt" dir="t"/>
+    </dgm:scene3d>
+    <dgm:sp3d/>
+    <dgm:txPr/>
+    <dgm:style>
+      <a:lnRef idx="2">
+        <a:scrgbClr r="0" g="0" b="0"/>
+      </a:lnRef>
+      <a:fillRef idx="0">
+        <a:scrgbClr r="0" g="0" b="0"/>
+      </a:fillRef>
+      <a:effectRef idx="0">
+        <a:scrgbClr r="0" g="0" b="0"/>
+      </a:effectRef>
+      <a:fontRef idx="minor"/>
+    </dgm:style>
+  </dgm:styleLbl>
+  <dgm:styleLbl name="parChTrans1D4">
+    <dgm:scene3d>
+      <a:camera prst="orthographicFront"/>
+      <a:lightRig rig="threePt" dir="t"/>
+    </dgm:scene3d>
+    <dgm:sp3d/>
+    <dgm:txPr/>
+    <dgm:style>
+      <a:lnRef idx="2">
+        <a:scrgbClr r="0" g="0" b="0"/>
+      </a:lnRef>
+      <a:fillRef idx="0">
+        <a:scrgbClr r="0" g="0" b="0"/>
+      </a:fillRef>
+      <a:effectRef idx="0">
+        <a:scrgbClr r="0" g="0" b="0"/>
+      </a:effectRef>
+      <a:fontRef idx="minor"/>
+    </dgm:style>
+  </dgm:styleLbl>
+  <dgm:styleLbl name="fgAcc1">
+    <dgm:scene3d>
+      <a:camera prst="orthographicFront"/>
+      <a:lightRig rig="threePt" dir="t"/>
+    </dgm:scene3d>
+    <dgm:sp3d/>
+    <dgm:txPr/>
+    <dgm:style>
+      <a:lnRef idx="2">
+        <a:scrgbClr r="0" g="0" b="0"/>
+      </a:lnRef>
+      <a:fillRef idx="1">
+        <a:scrgbClr r="0" g="0" b="0"/>
+      </a:fillRef>
+      <a:effectRef idx="0">
+        <a:scrgbClr r="0" g="0" b="0"/>
+      </a:effectRef>
+      <a:fontRef idx="minor"/>
+    </dgm:style>
+  </dgm:styleLbl>
+  <dgm:styleLbl name="conFgAcc1">
+    <dgm:scene3d>
+      <a:camera prst="orthographicFront"/>
+      <a:lightRig rig="threePt" dir="t"/>
+    </dgm:scene3d>
+    <dgm:sp3d/>
+    <dgm:txPr/>
+    <dgm:style>
+      <a:lnRef idx="2">
+        <a:scrgbClr r="0" g="0" b="0"/>
+      </a:lnRef>
+      <a:fillRef idx="1">
+        <a:scrgbClr r="0" g="0" b="0"/>
+      </a:fillRef>
+      <a:effectRef idx="0">
+        <a:scrgbClr r="0" g="0" b="0"/>
+      </a:effectRef>
+      <a:fontRef idx="minor"/>
+    </dgm:style>
+  </dgm:styleLbl>
+  <dgm:styleLbl name="alignAcc1">
+    <dgm:scene3d>
+      <a:camera prst="orthographicFront"/>
+      <a:lightRig rig="threePt" dir="t"/>
+    </dgm:scene3d>
+    <dgm:sp3d/>
+    <dgm:txPr/>
+    <dgm:style>
+      <a:lnRef idx="2">
+        <a:scrgbClr r="0" g="0" b="0"/>
+      </a:lnRef>
+      <a:fillRef idx="1">
+        <a:scrgbClr r="0" g="0" b="0"/>
+      </a:fillRef>
+      <a:effectRef idx="0">
+        <a:scrgbClr r="0" g="0" b="0"/>
+      </a:effectRef>
+      <a:fontRef idx="minor"/>
+    </dgm:style>
+  </dgm:styleLbl>
+  <dgm:styleLbl name="trAlignAcc1">
+    <dgm:scene3d>
+      <a:camera prst="orthographicFront"/>
+      <a:lightRig rig="threePt" dir="t"/>
+    </dgm:scene3d>
+    <dgm:sp3d/>
+    <dgm:txPr/>
+    <dgm:style>
+      <a:lnRef idx="1">
+        <a:scrgbClr r="0" g="0" b="0"/>
+      </a:lnRef>
+      <a:fillRef idx="1">
+        <a:scrgbClr r="0" g="0" b="0"/>
+      </a:fillRef>
+      <a:effectRef idx="0">
+        <a:scrgbClr r="0" g="0" b="0"/>
+      </a:effectRef>
+      <a:fontRef idx="minor"/>
+    </dgm:style>
+  </dgm:styleLbl>
+  <dgm:styleLbl name="bgAcc1">
+    <dgm:scene3d>
+      <a:camera prst="orthographicFront"/>
+      <a:lightRig rig="threePt" dir="t"/>
+    </dgm:scene3d>
+    <dgm:sp3d/>
+    <dgm:txPr/>
+    <dgm:style>
+      <a:lnRef idx="2">
+        <a:scrgbClr r="0" g="0" b="0"/>
+      </a:lnRef>
+      <a:fillRef idx="1">
+        <a:scrgbClr r="0" g="0" b="0"/>
+      </a:fillRef>
+      <a:effectRef idx="0">
+        <a:scrgbClr r="0" g="0" b="0"/>
+      </a:effectRef>
+      <a:fontRef idx="minor"/>
+    </dgm:style>
+  </dgm:styleLbl>
+  <dgm:styleLbl name="solidFgAcc1">
+    <dgm:scene3d>
+      <a:camera prst="orthographicFront"/>
+      <a:lightRig rig="threePt" dir="t"/>
+    </dgm:scene3d>
+    <dgm:sp3d/>
+    <dgm:txPr/>
+    <dgm:style>
+      <a:lnRef idx="2">
+        <a:scrgbClr r="0" g="0" b="0"/>
+      </a:lnRef>
+      <a:fillRef idx="1">
+        <a:scrgbClr r="0" g="0" b="0"/>
+      </a:fillRef>
+      <a:effectRef idx="0">
+        <a:scrgbClr r="0" g="0" b="0"/>
+      </a:effectRef>
+      <a:fontRef idx="minor"/>
+    </dgm:style>
+  </dgm:styleLbl>
+  <dgm:styleLbl name="solidAlignAcc1">
+    <dgm:scene3d>
+      <a:camera prst="orthographicFront"/>
+      <a:lightRig rig="threePt" dir="t"/>
+    </dgm:scene3d>
+    <dgm:sp3d/>
+    <dgm:txPr/>
+    <dgm:style>
+      <a:lnRef idx="2">
+        <a:scrgbClr r="0" g="0" b="0"/>
+      </a:lnRef>
+      <a:fillRef idx="1">
+        <a:scrgbClr r="0" g="0" b="0"/>
+      </a:fillRef>
+      <a:effectRef idx="0">
+        <a:scrgbClr r="0" g="0" b="0"/>
+      </a:effectRef>
+      <a:fontRef idx="minor"/>
+    </dgm:style>
+  </dgm:styleLbl>
+  <dgm:styleLbl name="solidBgAcc1">
+    <dgm:scene3d>
+      <a:camera prst="orthographicFront"/>
+      <a:lightRig rig="threePt" dir="t"/>
+    </dgm:scene3d>
+    <dgm:sp3d/>
+    <dgm:txPr/>
+    <dgm:style>
+      <a:lnRef idx="2">
+        <a:scrgbClr r="0" g="0" b="0"/>
+      </a:lnRef>
+      <a:fillRef idx="1">
+        <a:scrgbClr r="0" g="0" b="0"/>
+      </a:fillRef>
+      <a:effectRef idx="0">
+        <a:scrgbClr r="0" g="0" b="0"/>
+      </a:effectRef>
+      <a:fontRef idx="minor"/>
+    </dgm:style>
+  </dgm:styleLbl>
+  <dgm:styleLbl name="fgAccFollowNode1">
+    <dgm:scene3d>
+      <a:camera prst="orthographicFront"/>
+      <a:lightRig rig="threePt" dir="t"/>
+    </dgm:scene3d>
+    <dgm:sp3d/>
+    <dgm:txPr/>
+    <dgm:style>
+      <a:lnRef idx="2">
+        <a:scrgbClr r="0" g="0" b="0"/>
+      </a:lnRef>
+      <a:fillRef idx="1">
+        <a:scrgbClr r="0" g="0" b="0"/>
+      </a:fillRef>
+      <a:effectRef idx="0">
+        <a:scrgbClr r="0" g="0" b="0"/>
+      </a:effectRef>
+      <a:fontRef idx="minor"/>
+    </dgm:style>
+  </dgm:styleLbl>
+  <dgm:styleLbl name="alignAccFollowNode1">
+    <dgm:scene3d>
+      <a:camera prst="orthographicFront"/>
+      <a:lightRig rig="threePt" dir="t"/>
+    </dgm:scene3d>
+    <dgm:sp3d/>
+    <dgm:txPr/>
+    <dgm:style>
+      <a:lnRef idx="2">
+        <a:scrgbClr r="0" g="0" b="0"/>
+      </a:lnRef>
+      <a:fillRef idx="1">
+        <a:scrgbClr r="0" g="0" b="0"/>
+      </a:fillRef>
+      <a:effectRef idx="0">
+        <a:scrgbClr r="0" g="0" b="0"/>
+      </a:effectRef>
+      <a:fontRef idx="minor"/>
+    </dgm:style>
+  </dgm:styleLbl>
+  <dgm:styleLbl name="bgAccFollowNode1">
+    <dgm:scene3d>
+      <a:camera prst="orthographicFront"/>
+      <a:lightRig rig="threePt" dir="t"/>
+    </dgm:scene3d>
+    <dgm:sp3d/>
+    <dgm:txPr/>
+    <dgm:style>
+      <a:lnRef idx="2">
+        <a:scrgbClr r="0" g="0" b="0"/>
+      </a:lnRef>
+      <a:fillRef idx="1">
+        <a:scrgbClr r="0" g="0" b="0"/>
+      </a:fillRef>
+      <a:effectRef idx="0">
+        <a:scrgbClr r="0" g="0" b="0"/>
+      </a:effectRef>
+      <a:fontRef idx="minor"/>
+    </dgm:style>
+  </dgm:styleLbl>
+  <dgm:styleLbl name="fgAcc0">
+    <dgm:scene3d>
+      <a:camera prst="orthographicFront"/>
+      <a:lightRig rig="threePt" dir="t"/>
+    </dgm:scene3d>
+    <dgm:sp3d/>
+    <dgm:txPr/>
+    <dgm:style>
+      <a:lnRef idx="2">
+        <a:scrgbClr r="0" g="0" b="0"/>
+      </a:lnRef>
+      <a:fillRef idx="1">
+        <a:scrgbClr r="0" g="0" b="0"/>
+      </a:fillRef>
+      <a:effectRef idx="0">
+        <a:scrgbClr r="0" g="0" b="0"/>
+      </a:effectRef>
+      <a:fontRef idx="minor"/>
+    </dgm:style>
+  </dgm:styleLbl>
+  <dgm:styleLbl name="fgAcc2">
+    <dgm:scene3d>
+      <a:camera prst="orthographicFront"/>
+      <a:lightRig rig="threePt" dir="t"/>
+    </dgm:scene3d>
+    <dgm:sp3d/>
+    <dgm:txPr/>
+    <dgm:style>
+      <a:lnRef idx="2">
+        <a:scrgbClr r="0" g="0" b="0"/>
+      </a:lnRef>
+      <a:fillRef idx="1">
+        <a:scrgbClr r="0" g="0" b="0"/>
+      </a:fillRef>
+      <a:effectRef idx="0">
+        <a:scrgbClr r="0" g="0" b="0"/>
+      </a:effectRef>
+      <a:fontRef idx="minor"/>
+    </dgm:style>
+  </dgm:styleLbl>
+  <dgm:styleLbl name="fgAcc3">
+    <dgm:scene3d>
+      <a:camera prst="orthographicFront"/>
+      <a:lightRig rig="threePt" dir="t"/>
+    </dgm:scene3d>
+    <dgm:sp3d/>
+    <dgm:txPr/>
+    <dgm:style>
+      <a:lnRef idx="2">
+        <a:scrgbClr r="0" g="0" b="0"/>
+      </a:lnRef>
+      <a:fillRef idx="1">
+        <a:scrgbClr r="0" g="0" b="0"/>
+      </a:fillRef>
+      <a:effectRef idx="0">
+        <a:scrgbClr r="0" g="0" b="0"/>
+      </a:effectRef>
+      <a:fontRef idx="minor"/>
+    </dgm:style>
+  </dgm:styleLbl>
+  <dgm:styleLbl name="fgAcc4">
+    <dgm:scene3d>
+      <a:camera prst="orthographicFront"/>
+      <a:lightRig rig="threePt" dir="t"/>
+    </dgm:scene3d>
+    <dgm:sp3d/>
+    <dgm:txPr/>
+    <dgm:style>
+      <a:lnRef idx="2">
+        <a:scrgbClr r="0" g="0" b="0"/>
+      </a:lnRef>
+      <a:fillRef idx="1">
+        <a:scrgbClr r="0" g="0" b="0"/>
+      </a:fillRef>
+      <a:effectRef idx="0">
+        <a:scrgbClr r="0" g="0" b="0"/>
+      </a:effectRef>
+      <a:fontRef idx="minor"/>
+    </dgm:style>
+  </dgm:styleLbl>
+  <dgm:styleLbl name="bgShp">
+    <dgm:scene3d>
+      <a:camera prst="orthographicFront"/>
+      <a:lightRig rig="threePt" dir="t"/>
+    </dgm:scene3d>
+    <dgm:sp3d/>
+    <dgm:txPr/>
+    <dgm:style>
+      <a:lnRef idx="0">
+        <a:scrgbClr r="0" g="0" b="0"/>
+      </a:lnRef>
+      <a:fillRef idx="1">
+        <a:scrgbClr r="0" g="0" b="0"/>
+      </a:fillRef>
+      <a:effectRef idx="0">
+        <a:scrgbClr r="0" g="0" b="0"/>
+      </a:effectRef>
+      <a:fontRef idx="minor"/>
+    </dgm:style>
+  </dgm:styleLbl>
+  <dgm:styleLbl name="dkBgShp">
+    <dgm:scene3d>
+      <a:camera prst="orthographicFront"/>
+      <a:lightRig rig="threePt" dir="t"/>
+    </dgm:scene3d>
+    <dgm:sp3d/>
+    <dgm:txPr/>
+    <dgm:style>
+      <a:lnRef idx="0">
+        <a:scrgbClr r="0" g="0" b="0"/>
+      </a:lnRef>
+      <a:fillRef idx="1">
+        <a:scrgbClr r="0" g="0" b="0"/>
+      </a:fillRef>
+      <a:effectRef idx="0">
+        <a:scrgbClr r="0" g="0" b="0"/>
+      </a:effectRef>
+      <a:fontRef idx="minor"/>
+    </dgm:style>
+  </dgm:styleLbl>
+  <dgm:styleLbl name="trBgShp">
+    <dgm:scene3d>
+      <a:camera prst="orthographicFront"/>
+      <a:lightRig rig="threePt" dir="t"/>
+    </dgm:scene3d>
+    <dgm:sp3d/>
+    <dgm:txPr/>
+    <dgm:style>
+      <a:lnRef idx="0">
+        <a:scrgbClr r="0" g="0" b="0"/>
+      </a:lnRef>
+      <a:fillRef idx="1">
+        <a:scrgbClr r="0" g="0" b="0"/>
+      </a:fillRef>
+      <a:effectRef idx="0">
+        <a:scrgbClr r="0" g="0" b="0"/>
+      </a:effectRef>
+      <a:fontRef idx="minor"/>
+    </dgm:style>
+  </dgm:styleLbl>
+  <dgm:styleLbl name="fgShp">
+    <dgm:scene3d>
+      <a:camera prst="orthographicFront"/>
+      <a:lightRig rig="threePt" dir="t"/>
+    </dgm:scene3d>
+    <dgm:sp3d/>
+    <dgm:txPr/>
+    <dgm:style>
+      <a:lnRef idx="2">
+        <a:scrgbClr r="0" g="0" b="0"/>
+      </a:lnRef>
+      <a:fillRef idx="1">
+        <a:scrgbClr r="0" g="0" b="0"/>
+      </a:fillRef>
+      <a:effectRef idx="0">
+        <a:scrgbClr r="0" g="0" b="0"/>
+      </a:effectRef>
+      <a:fontRef idx="minor"/>
+    </dgm:style>
+  </dgm:styleLbl>
+  <dgm:styleLbl name="revTx">
+    <dgm:scene3d>
+      <a:camera prst="orthographicFront"/>
+      <a:lightRig rig="threePt" dir="t"/>
+    </dgm:scene3d>
+    <dgm:sp3d/>
+    <dgm:txPr/>
+    <dgm:style>
+      <a:lnRef idx="0">
+        <a:scrgbClr r="0" g="0" b="0"/>
+      </a:lnRef>
+      <a:fillRef idx="0">
+        <a:scrgbClr r="0" g="0" b="0"/>
+      </a:fillRef>
+      <a:effectRef idx="0">
+        <a:scrgbClr r="0" g="0" b="0"/>
+      </a:effectRef>
+      <a:fontRef idx="minor"/>
+    </dgm:style>
+  </dgm:styleLbl>
+</dgm:styleDef>
+</file>
+
+<file path=ppt/diagrams/quickStyle4.xml><?xml version="1.0" encoding="utf-8"?>
+<dgm:styleDef xmlns:dgm="http://schemas.openxmlformats.org/drawingml/2006/diagram" xmlns:a="http://schemas.openxmlformats.org/drawingml/2006/main" uniqueId="urn:microsoft.com/office/officeart/2005/8/quickstyle/3d2#1">
   <dgm:title val=""/>
   <dgm:desc val=""/>
   <dgm:catLst>
@@ -9992,7 +13361,7 @@
           <a:p>
             <a:fld id="{542DCB0F-B87B-4B4E-BDCD-2EB9E0FDC28C}" type="datetimeFigureOut">
               <a:rPr lang="en-NL" smtClean="0"/>
-              <a:t>11/03/2026</a:t>
+              <a:t>11/09/2026</a:t>
             </a:fld>
             <a:endParaRPr lang="en-NL"/>
           </a:p>
@@ -10861,7 +14230,7 @@
           <a:p>
             <a:fld id="{4B7CFC0D-3812-4AD8-B97A-8941F4E3CE1C}" type="slidenum">
               <a:rPr lang="en-NL" smtClean="0"/>
-              <a:t>11</a:t>
+              <a:t>12</a:t>
             </a:fld>
             <a:endParaRPr lang="en-NL"/>
           </a:p>
@@ -11163,7 +14532,7 @@
           <a:p>
             <a:fld id="{E80C50CD-E178-4744-9B35-B2F624D6C5E9}" type="datetimeFigureOut">
               <a:rPr lang="en-US" smtClean="0"/>
-              <a:t>3/11/26</a:t>
+              <a:t>9/11/26</a:t>
             </a:fld>
             <a:endParaRPr lang="en-US"/>
           </a:p>
@@ -11361,7 +14730,7 @@
           <a:p>
             <a:fld id="{E80C50CD-E178-4744-9B35-B2F624D6C5E9}" type="datetimeFigureOut">
               <a:rPr lang="en-US" smtClean="0"/>
-              <a:t>3/11/26</a:t>
+              <a:t>9/11/26</a:t>
             </a:fld>
             <a:endParaRPr lang="en-US"/>
           </a:p>
@@ -11569,7 +14938,7 @@
           <a:p>
             <a:fld id="{E80C50CD-E178-4744-9B35-B2F624D6C5E9}" type="datetimeFigureOut">
               <a:rPr lang="en-US" smtClean="0"/>
-              <a:t>3/11/26</a:t>
+              <a:t>9/11/26</a:t>
             </a:fld>
             <a:endParaRPr lang="en-US"/>
           </a:p>
@@ -11819,7 +15188,7 @@
           <a:p>
             <a:fld id="{E80C50CD-E178-4744-9B35-B2F624D6C5E9}" type="datetimeFigureOut">
               <a:rPr lang="en-US" smtClean="0"/>
-              <a:t>3/11/26</a:t>
+              <a:t>9/11/26</a:t>
             </a:fld>
             <a:endParaRPr lang="en-US"/>
           </a:p>
@@ -12098,7 +15467,7 @@
           <a:p>
             <a:fld id="{E80C50CD-E178-4744-9B35-B2F624D6C5E9}" type="datetimeFigureOut">
               <a:rPr lang="en-US" smtClean="0"/>
-              <a:t>3/11/26</a:t>
+              <a:t>9/11/26</a:t>
             </a:fld>
             <a:endParaRPr lang="en-US"/>
           </a:p>
@@ -12415,7 +15784,7 @@
           <a:p>
             <a:fld id="{E80C50CD-E178-4744-9B35-B2F624D6C5E9}" type="datetimeFigureOut">
               <a:rPr lang="en-US" smtClean="0"/>
-              <a:t>3/11/26</a:t>
+              <a:t>9/11/26</a:t>
             </a:fld>
             <a:endParaRPr lang="en-US"/>
           </a:p>
@@ -12831,7 +16200,7 @@
           <a:p>
             <a:fld id="{E80C50CD-E178-4744-9B35-B2F624D6C5E9}" type="datetimeFigureOut">
               <a:rPr lang="en-US" smtClean="0"/>
-              <a:t>3/11/26</a:t>
+              <a:t>9/11/26</a:t>
             </a:fld>
             <a:endParaRPr lang="en-US"/>
           </a:p>
@@ -12972,7 +16341,7 @@
           <a:p>
             <a:fld id="{E80C50CD-E178-4744-9B35-B2F624D6C5E9}" type="datetimeFigureOut">
               <a:rPr lang="en-US" smtClean="0"/>
-              <a:t>3/11/26</a:t>
+              <a:t>9/11/26</a:t>
             </a:fld>
             <a:endParaRPr lang="en-US"/>
           </a:p>
@@ -13085,7 +16454,7 @@
           <a:p>
             <a:fld id="{E80C50CD-E178-4744-9B35-B2F624D6C5E9}" type="datetimeFigureOut">
               <a:rPr lang="en-US" smtClean="0"/>
-              <a:t>3/11/26</a:t>
+              <a:t>9/11/26</a:t>
             </a:fld>
             <a:endParaRPr lang="en-US"/>
           </a:p>
@@ -13402,7 +16771,7 @@
           <a:p>
             <a:fld id="{E80C50CD-E178-4744-9B35-B2F624D6C5E9}" type="datetimeFigureOut">
               <a:rPr lang="en-US" smtClean="0"/>
-              <a:t>3/11/26</a:t>
+              <a:t>9/11/26</a:t>
             </a:fld>
             <a:endParaRPr lang="en-US"/>
           </a:p>
@@ -13694,7 +17063,7 @@
           <a:p>
             <a:fld id="{E80C50CD-E178-4744-9B35-B2F624D6C5E9}" type="datetimeFigureOut">
               <a:rPr lang="en-US" smtClean="0"/>
-              <a:t>3/11/26</a:t>
+              <a:t>9/11/26</a:t>
             </a:fld>
             <a:endParaRPr lang="en-US"/>
           </a:p>
@@ -13934,7 +17303,7 @@
             <a:fld id="{E80C50CD-E178-4744-9B35-B2F624D6C5E9}" type="datetimeFigureOut">
               <a:rPr lang="en-US" smtClean="0"/>
               <a:pPr/>
-              <a:t>3/11/26</a:t>
+              <a:t>9/11/26</a:t>
             </a:fld>
             <a:endParaRPr lang="en-US"/>
           </a:p>
@@ -14902,6 +18271,98 @@
 <file path=ppt/slides/slide11.xml><?xml version="1.0" encoding="utf-8"?>
 <p:sld xmlns:a="http://schemas.openxmlformats.org/drawingml/2006/main" xmlns:r="http://schemas.openxmlformats.org/officeDocument/2006/relationships" xmlns:p="http://schemas.openxmlformats.org/presentationml/2006/main">
   <p:cSld>
+    <p:spTree>
+      <p:nvGrpSpPr>
+        <p:cNvPr id="1" name=""/>
+        <p:cNvGrpSpPr/>
+        <p:nvPr/>
+      </p:nvGrpSpPr>
+      <p:grpSpPr>
+        <a:xfrm>
+          <a:off x="0" y="0"/>
+          <a:ext cx="0" cy="0"/>
+          <a:chOff x="0" y="0"/>
+          <a:chExt cx="0" cy="0"/>
+        </a:xfrm>
+      </p:grpSpPr>
+      <p:sp>
+        <p:nvSpPr>
+          <p:cNvPr id="2" name="Title 1">
+            <a:extLst>
+              <a:ext uri="{FF2B5EF4-FFF2-40B4-BE49-F238E27FC236}">
+                <a16:creationId xmlns:a16="http://schemas.microsoft.com/office/drawing/2014/main" id="{909FF648-A78F-7542-DABA-8EC5A83E6610}"/>
+              </a:ext>
+            </a:extLst>
+          </p:cNvPr>
+          <p:cNvSpPr>
+            <a:spLocks noGrp="1"/>
+          </p:cNvSpPr>
+          <p:nvPr>
+            <p:ph type="title"/>
+          </p:nvPr>
+        </p:nvSpPr>
+        <p:spPr>
+          <a:xfrm>
+            <a:off x="838200" y="557189"/>
+            <a:ext cx="3374136" cy="5567891"/>
+          </a:xfrm>
+        </p:spPr>
+        <p:txBody>
+          <a:bodyPr>
+            <a:normAutofit/>
+          </a:bodyPr>
+          <a:lstStyle/>
+          <a:p>
+            <a:r>
+              <a:rPr lang="en-US" sz="5200" dirty="0"/>
+              <a:t>Is AI for you? </a:t>
+            </a:r>
+            <a:endParaRPr lang="en-NL" sz="5200" dirty="0"/>
+          </a:p>
+        </p:txBody>
+      </p:sp>
+      <p:graphicFrame>
+        <p:nvGraphicFramePr>
+          <p:cNvPr id="19" name="Rectangle 1">
+            <a:extLst>
+              <a:ext uri="{FF2B5EF4-FFF2-40B4-BE49-F238E27FC236}">
+                <a16:creationId xmlns:a16="http://schemas.microsoft.com/office/drawing/2014/main" id="{189A3AFA-DEC1-45DF-67A9-5CF7D9677784}"/>
+              </a:ext>
+            </a:extLst>
+          </p:cNvPr>
+          <p:cNvGraphicFramePr>
+            <a:graphicFrameLocks noGrp="1"/>
+          </p:cNvGraphicFramePr>
+          <p:nvPr>
+            <p:ph idx="1"/>
+          </p:nvPr>
+        </p:nvGraphicFramePr>
+        <p:xfrm>
+          <a:off x="5093208" y="620392"/>
+          <a:ext cx="6263640" cy="5504688"/>
+        </p:xfrm>
+        <a:graphic>
+          <a:graphicData uri="http://schemas.openxmlformats.org/drawingml/2006/diagram">
+            <dgm:relIds xmlns:dgm="http://schemas.openxmlformats.org/drawingml/2006/diagram" xmlns:r="http://schemas.openxmlformats.org/officeDocument/2006/relationships" r:dm="rId2" r:lo="rId3" r:qs="rId4" r:cs="rId5"/>
+          </a:graphicData>
+        </a:graphic>
+      </p:graphicFrame>
+    </p:spTree>
+    <p:extLst>
+      <p:ext uri="{BB962C8B-B14F-4D97-AF65-F5344CB8AC3E}">
+        <p14:creationId xmlns:p14="http://schemas.microsoft.com/office/powerpoint/2010/main" val="734047917"/>
+      </p:ext>
+    </p:extLst>
+  </p:cSld>
+  <p:clrMapOvr>
+    <a:masterClrMapping/>
+  </p:clrMapOvr>
+</p:sld>
+</file>
+
+<file path=ppt/slides/slide12.xml><?xml version="1.0" encoding="utf-8"?>
+<p:sld xmlns:a="http://schemas.openxmlformats.org/drawingml/2006/main" xmlns:r="http://schemas.openxmlformats.org/officeDocument/2006/relationships" xmlns:p="http://schemas.openxmlformats.org/presentationml/2006/main">
+  <p:cSld>
     <p:bg>
       <p:bgPr>
         <a:solidFill>
@@ -15475,8 +18936,8 @@
         </p:nvSpPr>
         <p:spPr>
           <a:xfrm>
-            <a:off x="550443" y="6397522"/>
-            <a:ext cx="6096000" cy="369332"/>
+            <a:off x="614783" y="6448111"/>
+            <a:ext cx="10959386" cy="307777"/>
           </a:xfrm>
           <a:prstGeom prst="rect">
             <a:avLst/>
@@ -15490,45 +18951,63 @@
           <a:lstStyle/>
           <a:p>
             <a:r>
-              <a:rPr lang="en-US" dirty="0">
+              <a:rPr lang="en-GB" sz="1400" dirty="0">
                 <a:hlinkClick r:id="rId8"/>
               </a:rPr>
-              <a:t>AI Workshop.docx</a:t>
+              <a:t>https://</a:t>
             </a:r>
-            <a:endParaRPr lang="en-NL" dirty="0"/>
+            <a:r>
+              <a:rPr lang="en-GB" sz="1400" dirty="0" err="1">
+                <a:hlinkClick r:id="rId8"/>
+              </a:rPr>
+              <a:t>github.com</a:t>
+            </a:r>
+            <a:r>
+              <a:rPr lang="en-GB" sz="1400" dirty="0">
+                <a:hlinkClick r:id="rId8"/>
+              </a:rPr>
+              <a:t>/</a:t>
+            </a:r>
+            <a:r>
+              <a:rPr lang="en-GB" sz="1400" dirty="0" err="1">
+                <a:hlinkClick r:id="rId8"/>
+              </a:rPr>
+              <a:t>imanmossavat</a:t>
+            </a:r>
+            <a:r>
+              <a:rPr lang="en-GB" sz="1400" dirty="0">
+                <a:hlinkClick r:id="rId8"/>
+              </a:rPr>
+              <a:t>/ml-teaching-materials-</a:t>
+            </a:r>
+            <a:r>
+              <a:rPr lang="en-GB" sz="1400" dirty="0" err="1">
+                <a:hlinkClick r:id="rId8"/>
+              </a:rPr>
+              <a:t>fontys</a:t>
+            </a:r>
+            <a:r>
+              <a:rPr lang="en-GB" sz="1400" dirty="0">
+                <a:hlinkClick r:id="rId8"/>
+              </a:rPr>
+              <a:t>/blob/main/</a:t>
+            </a:r>
+            <a:r>
+              <a:rPr lang="en-GB" sz="1400" dirty="0" err="1">
+                <a:hlinkClick r:id="rId8"/>
+              </a:rPr>
+              <a:t>orientation_startsemester</a:t>
+            </a:r>
+            <a:r>
+              <a:rPr lang="en-GB" sz="1400" dirty="0">
+                <a:hlinkClick r:id="rId8"/>
+              </a:rPr>
+              <a:t>/Make_a_poster_session_1.docx</a:t>
+            </a:r>
+            <a:endParaRPr lang="en-NL" sz="1400" dirty="0"/>
           </a:p>
         </p:txBody>
       </p:sp>
-      <p:pic>
-        <p:nvPicPr>
-          <p:cNvPr id="27" name="Picture 26">
-            <a:extLst>
-              <a:ext uri="{FF2B5EF4-FFF2-40B4-BE49-F238E27FC236}">
-                <a16:creationId xmlns:a16="http://schemas.microsoft.com/office/drawing/2014/main" id="{CD9CBE60-7923-21C9-8D9F-AE6584DA1CB4}"/>
-              </a:ext>
-            </a:extLst>
-          </p:cNvPr>
-          <p:cNvPicPr>
-            <a:picLocks noChangeAspect="1"/>
-          </p:cNvPicPr>
-          <p:nvPr/>
-        </p:nvPicPr>
-        <p:blipFill>
-          <a:blip r:embed="rId9"/>
-          <a:stretch>
-            <a:fillRect/>
-          </a:stretch>
-        </p:blipFill>
-        <p:spPr>
-          <a:xfrm>
-            <a:off x="265545" y="1161913"/>
-            <a:ext cx="3486441" cy="3486441"/>
-          </a:xfrm>
-          <a:prstGeom prst="rect">
-            <a:avLst/>
-          </a:prstGeom>
-        </p:spPr>
-      </p:pic>
     </p:spTree>
     <p:extLst>
       <p:ext uri="{BB962C8B-B14F-4D97-AF65-F5344CB8AC3E}">
